--- a/VMIT/PYTHON/Day 5 VMIT.pptx
+++ b/VMIT/PYTHON/Day 5 VMIT.pptx
@@ -12,6 +12,22 @@
     <p:sldId id="261" r:id="rId6"/>
     <p:sldId id="262" r:id="rId7"/>
     <p:sldId id="260" r:id="rId8"/>
+    <p:sldId id="263" r:id="rId9"/>
+    <p:sldId id="276" r:id="rId10"/>
+    <p:sldId id="277" r:id="rId11"/>
+    <p:sldId id="278" r:id="rId12"/>
+    <p:sldId id="279" r:id="rId13"/>
+    <p:sldId id="264" r:id="rId14"/>
+    <p:sldId id="265" r:id="rId15"/>
+    <p:sldId id="266" r:id="rId16"/>
+    <p:sldId id="267" r:id="rId17"/>
+    <p:sldId id="268" r:id="rId18"/>
+    <p:sldId id="270" r:id="rId19"/>
+    <p:sldId id="271" r:id="rId20"/>
+    <p:sldId id="272" r:id="rId21"/>
+    <p:sldId id="273" r:id="rId22"/>
+    <p:sldId id="274" r:id="rId23"/>
+    <p:sldId id="275" r:id="rId24"/>
   </p:sldIdLst>
   <p:sldSz cx="12192000" cy="6858000"/>
   <p:notesSz cx="6858000" cy="9144000"/>
@@ -110,6 +126,11 @@
       </a:defRPr>
     </a:lvl9pPr>
   </p:defaultTextStyle>
+  <p:extLst>
+    <p:ext uri="{EFAFB233-063F-42B5-8137-9DF3F51BA10A}">
+      <p15:sldGuideLst xmlns:p15="http://schemas.microsoft.com/office/powerpoint/2012/main"/>
+    </p:ext>
+  </p:extLst>
 </p:presentation>
 </file>
 
@@ -262,7 +283,7 @@
           <a:p>
             <a:fld id="{B02F1D1B-F2F1-4485-9F39-D01605053868}" type="datetimeFigureOut">
               <a:rPr lang="en-IN" smtClean="0"/>
-              <a:t>23-04-2026</a:t>
+              <a:t>24-04-2026</a:t>
             </a:fld>
             <a:endParaRPr lang="en-IN"/>
           </a:p>
@@ -462,7 +483,7 @@
           <a:p>
             <a:fld id="{B02F1D1B-F2F1-4485-9F39-D01605053868}" type="datetimeFigureOut">
               <a:rPr lang="en-IN" smtClean="0"/>
-              <a:t>23-04-2026</a:t>
+              <a:t>24-04-2026</a:t>
             </a:fld>
             <a:endParaRPr lang="en-IN"/>
           </a:p>
@@ -672,7 +693,7 @@
           <a:p>
             <a:fld id="{B02F1D1B-F2F1-4485-9F39-D01605053868}" type="datetimeFigureOut">
               <a:rPr lang="en-IN" smtClean="0"/>
-              <a:t>23-04-2026</a:t>
+              <a:t>24-04-2026</a:t>
             </a:fld>
             <a:endParaRPr lang="en-IN"/>
           </a:p>
@@ -872,7 +893,7 @@
           <a:p>
             <a:fld id="{B02F1D1B-F2F1-4485-9F39-D01605053868}" type="datetimeFigureOut">
               <a:rPr lang="en-IN" smtClean="0"/>
-              <a:t>23-04-2026</a:t>
+              <a:t>24-04-2026</a:t>
             </a:fld>
             <a:endParaRPr lang="en-IN"/>
           </a:p>
@@ -1148,7 +1169,7 @@
           <a:p>
             <a:fld id="{B02F1D1B-F2F1-4485-9F39-D01605053868}" type="datetimeFigureOut">
               <a:rPr lang="en-IN" smtClean="0"/>
-              <a:t>23-04-2026</a:t>
+              <a:t>24-04-2026</a:t>
             </a:fld>
             <a:endParaRPr lang="en-IN"/>
           </a:p>
@@ -1416,7 +1437,7 @@
           <a:p>
             <a:fld id="{B02F1D1B-F2F1-4485-9F39-D01605053868}" type="datetimeFigureOut">
               <a:rPr lang="en-IN" smtClean="0"/>
-              <a:t>23-04-2026</a:t>
+              <a:t>24-04-2026</a:t>
             </a:fld>
             <a:endParaRPr lang="en-IN"/>
           </a:p>
@@ -1831,7 +1852,7 @@
           <a:p>
             <a:fld id="{B02F1D1B-F2F1-4485-9F39-D01605053868}" type="datetimeFigureOut">
               <a:rPr lang="en-IN" smtClean="0"/>
-              <a:t>23-04-2026</a:t>
+              <a:t>24-04-2026</a:t>
             </a:fld>
             <a:endParaRPr lang="en-IN"/>
           </a:p>
@@ -1973,7 +1994,7 @@
           <a:p>
             <a:fld id="{B02F1D1B-F2F1-4485-9F39-D01605053868}" type="datetimeFigureOut">
               <a:rPr lang="en-IN" smtClean="0"/>
-              <a:t>23-04-2026</a:t>
+              <a:t>24-04-2026</a:t>
             </a:fld>
             <a:endParaRPr lang="en-IN"/>
           </a:p>
@@ -2086,7 +2107,7 @@
           <a:p>
             <a:fld id="{B02F1D1B-F2F1-4485-9F39-D01605053868}" type="datetimeFigureOut">
               <a:rPr lang="en-IN" smtClean="0"/>
-              <a:t>23-04-2026</a:t>
+              <a:t>24-04-2026</a:t>
             </a:fld>
             <a:endParaRPr lang="en-IN"/>
           </a:p>
@@ -2399,7 +2420,7 @@
           <a:p>
             <a:fld id="{B02F1D1B-F2F1-4485-9F39-D01605053868}" type="datetimeFigureOut">
               <a:rPr lang="en-IN" smtClean="0"/>
-              <a:t>23-04-2026</a:t>
+              <a:t>24-04-2026</a:t>
             </a:fld>
             <a:endParaRPr lang="en-IN"/>
           </a:p>
@@ -2688,7 +2709,7 @@
           <a:p>
             <a:fld id="{B02F1D1B-F2F1-4485-9F39-D01605053868}" type="datetimeFigureOut">
               <a:rPr lang="en-IN" smtClean="0"/>
-              <a:t>23-04-2026</a:t>
+              <a:t>24-04-2026</a:t>
             </a:fld>
             <a:endParaRPr lang="en-IN"/>
           </a:p>
@@ -2931,7 +2952,7 @@
           <a:p>
             <a:fld id="{B02F1D1B-F2F1-4485-9F39-D01605053868}" type="datetimeFigureOut">
               <a:rPr lang="en-IN" smtClean="0"/>
-              <a:t>23-04-2026</a:t>
+              <a:t>24-04-2026</a:t>
             </a:fld>
             <a:endParaRPr lang="en-IN"/>
           </a:p>
@@ -4637,6 +4658,3098 @@
       <p:bldP spid="2" grpId="0"/>
     </p:bldLst>
   </p:timing>
+</p:sld>
+</file>
+
+<file path=ppt/slides/slide10.xml><?xml version="1.0" encoding="utf-8"?>
+<p:sld xmlns:a="http://schemas.openxmlformats.org/drawingml/2006/main" xmlns:r="http://schemas.openxmlformats.org/officeDocument/2006/relationships" xmlns:p="http://schemas.openxmlformats.org/presentationml/2006/main">
+  <p:cSld>
+    <p:spTree>
+      <p:nvGrpSpPr>
+        <p:cNvPr id="1" name=""/>
+        <p:cNvGrpSpPr/>
+        <p:nvPr/>
+      </p:nvGrpSpPr>
+      <p:grpSpPr>
+        <a:xfrm>
+          <a:off x="0" y="0"/>
+          <a:ext cx="0" cy="0"/>
+          <a:chOff x="0" y="0"/>
+          <a:chExt cx="0" cy="0"/>
+        </a:xfrm>
+      </p:grpSpPr>
+      <p:sp>
+        <p:nvSpPr>
+          <p:cNvPr id="2" name="Title 1">
+            <a:extLst>
+              <a:ext uri="{FF2B5EF4-FFF2-40B4-BE49-F238E27FC236}">
+                <a16:creationId xmlns:a16="http://schemas.microsoft.com/office/drawing/2014/main" id="{FC33B076-8784-99B0-2E93-45FAC15021EB}"/>
+              </a:ext>
+            </a:extLst>
+          </p:cNvPr>
+          <p:cNvSpPr>
+            <a:spLocks noGrp="1"/>
+          </p:cNvSpPr>
+          <p:nvPr>
+            <p:ph type="title"/>
+          </p:nvPr>
+        </p:nvSpPr>
+        <p:spPr/>
+        <p:txBody>
+          <a:bodyPr/>
+          <a:lstStyle/>
+          <a:p>
+            <a:r>
+              <a:rPr lang="en-IN" dirty="0"/>
+              <a:t>BFS (Breadth First Search)</a:t>
+            </a:r>
+          </a:p>
+        </p:txBody>
+      </p:sp>
+      <p:pic>
+        <p:nvPicPr>
+          <p:cNvPr id="4" name="Picture 3">
+            <a:extLst>
+              <a:ext uri="{FF2B5EF4-FFF2-40B4-BE49-F238E27FC236}">
+                <a16:creationId xmlns:a16="http://schemas.microsoft.com/office/drawing/2014/main" id="{FB64AEC8-AE6D-94BD-23F6-56FC489F3C43}"/>
+              </a:ext>
+            </a:extLst>
+          </p:cNvPr>
+          <p:cNvPicPr>
+            <a:picLocks noChangeAspect="1"/>
+          </p:cNvPicPr>
+          <p:nvPr/>
+        </p:nvPicPr>
+        <p:blipFill>
+          <a:blip r:embed="rId2"/>
+          <a:stretch>
+            <a:fillRect/>
+          </a:stretch>
+        </p:blipFill>
+        <p:spPr>
+          <a:xfrm>
+            <a:off x="838200" y="1956920"/>
+            <a:ext cx="5334744" cy="2200582"/>
+          </a:xfrm>
+          <a:prstGeom prst="rect">
+            <a:avLst/>
+          </a:prstGeom>
+        </p:spPr>
+      </p:pic>
+      <p:pic>
+        <p:nvPicPr>
+          <p:cNvPr id="6" name="Picture 5">
+            <a:extLst>
+              <a:ext uri="{FF2B5EF4-FFF2-40B4-BE49-F238E27FC236}">
+                <a16:creationId xmlns:a16="http://schemas.microsoft.com/office/drawing/2014/main" id="{0A32F179-BA95-75D6-097F-D320A984A423}"/>
+              </a:ext>
+            </a:extLst>
+          </p:cNvPr>
+          <p:cNvPicPr>
+            <a:picLocks noChangeAspect="1"/>
+          </p:cNvPicPr>
+          <p:nvPr/>
+        </p:nvPicPr>
+        <p:blipFill>
+          <a:blip r:embed="rId3"/>
+          <a:stretch>
+            <a:fillRect/>
+          </a:stretch>
+        </p:blipFill>
+        <p:spPr>
+          <a:xfrm>
+            <a:off x="6610495" y="1833340"/>
+            <a:ext cx="4658375" cy="3191320"/>
+          </a:xfrm>
+          <a:prstGeom prst="rect">
+            <a:avLst/>
+          </a:prstGeom>
+          <a:ln>
+            <a:noFill/>
+          </a:ln>
+          <a:effectLst>
+            <a:outerShdw blurRad="292100" dist="139700" dir="2700000" algn="tl" rotWithShape="0">
+              <a:srgbClr val="333333">
+                <a:alpha val="65000"/>
+              </a:srgbClr>
+            </a:outerShdw>
+          </a:effectLst>
+        </p:spPr>
+      </p:pic>
+    </p:spTree>
+    <p:extLst>
+      <p:ext uri="{BB962C8B-B14F-4D97-AF65-F5344CB8AC3E}">
+        <p14:creationId xmlns:p14="http://schemas.microsoft.com/office/powerpoint/2010/main" val="1559996038"/>
+      </p:ext>
+    </p:extLst>
+  </p:cSld>
+  <p:clrMapOvr>
+    <a:masterClrMapping/>
+  </p:clrMapOvr>
+</p:sld>
+</file>
+
+<file path=ppt/slides/slide11.xml><?xml version="1.0" encoding="utf-8"?>
+<p:sld xmlns:a="http://schemas.openxmlformats.org/drawingml/2006/main" xmlns:r="http://schemas.openxmlformats.org/officeDocument/2006/relationships" xmlns:p="http://schemas.openxmlformats.org/presentationml/2006/main">
+  <p:cSld>
+    <p:spTree>
+      <p:nvGrpSpPr>
+        <p:cNvPr id="1" name=""/>
+        <p:cNvGrpSpPr/>
+        <p:nvPr/>
+      </p:nvGrpSpPr>
+      <p:grpSpPr>
+        <a:xfrm>
+          <a:off x="0" y="0"/>
+          <a:ext cx="0" cy="0"/>
+          <a:chOff x="0" y="0"/>
+          <a:chExt cx="0" cy="0"/>
+        </a:xfrm>
+      </p:grpSpPr>
+      <p:sp>
+        <p:nvSpPr>
+          <p:cNvPr id="2" name="Title 1">
+            <a:extLst>
+              <a:ext uri="{FF2B5EF4-FFF2-40B4-BE49-F238E27FC236}">
+                <a16:creationId xmlns:a16="http://schemas.microsoft.com/office/drawing/2014/main" id="{462B63F0-DC06-0C8E-7AED-17A65CE12664}"/>
+              </a:ext>
+            </a:extLst>
+          </p:cNvPr>
+          <p:cNvSpPr>
+            <a:spLocks noGrp="1"/>
+          </p:cNvSpPr>
+          <p:nvPr>
+            <p:ph type="title"/>
+          </p:nvPr>
+        </p:nvSpPr>
+        <p:spPr/>
+        <p:txBody>
+          <a:bodyPr/>
+          <a:lstStyle/>
+          <a:p>
+            <a:r>
+              <a:rPr lang="en-IN" dirty="0"/>
+              <a:t>BST (Binary Search Tree)</a:t>
+            </a:r>
+          </a:p>
+        </p:txBody>
+      </p:sp>
+      <p:pic>
+        <p:nvPicPr>
+          <p:cNvPr id="4" name="Picture 3">
+            <a:extLst>
+              <a:ext uri="{FF2B5EF4-FFF2-40B4-BE49-F238E27FC236}">
+                <a16:creationId xmlns:a16="http://schemas.microsoft.com/office/drawing/2014/main" id="{6BEDBB65-E7E1-02EF-15CB-9CAE68F3B19A}"/>
+              </a:ext>
+            </a:extLst>
+          </p:cNvPr>
+          <p:cNvPicPr>
+            <a:picLocks noChangeAspect="1"/>
+          </p:cNvPicPr>
+          <p:nvPr/>
+        </p:nvPicPr>
+        <p:blipFill>
+          <a:blip r:embed="rId2"/>
+          <a:stretch>
+            <a:fillRect/>
+          </a:stretch>
+        </p:blipFill>
+        <p:spPr>
+          <a:xfrm>
+            <a:off x="1047045" y="1690688"/>
+            <a:ext cx="5048955" cy="1000265"/>
+          </a:xfrm>
+          <a:prstGeom prst="rect">
+            <a:avLst/>
+          </a:prstGeom>
+        </p:spPr>
+      </p:pic>
+      <p:sp>
+        <p:nvSpPr>
+          <p:cNvPr id="6" name="TextBox 5">
+            <a:extLst>
+              <a:ext uri="{FF2B5EF4-FFF2-40B4-BE49-F238E27FC236}">
+                <a16:creationId xmlns:a16="http://schemas.microsoft.com/office/drawing/2014/main" id="{43955930-D197-6C3B-C8FE-B2954286AD1C}"/>
+              </a:ext>
+            </a:extLst>
+          </p:cNvPr>
+          <p:cNvSpPr txBox="1"/>
+          <p:nvPr/>
+        </p:nvSpPr>
+        <p:spPr>
+          <a:xfrm>
+            <a:off x="3048838" y="3016251"/>
+            <a:ext cx="6094324" cy="369332"/>
+          </a:xfrm>
+          <a:prstGeom prst="rect">
+            <a:avLst/>
+          </a:prstGeom>
+        </p:spPr>
+        <p:style>
+          <a:lnRef idx="2">
+            <a:schemeClr val="accent2"/>
+          </a:lnRef>
+          <a:fillRef idx="1">
+            <a:schemeClr val="lt1"/>
+          </a:fillRef>
+          <a:effectRef idx="0">
+            <a:schemeClr val="accent2"/>
+          </a:effectRef>
+          <a:fontRef idx="minor">
+            <a:schemeClr val="dk1"/>
+          </a:fontRef>
+        </p:style>
+        <p:txBody>
+          <a:bodyPr wrap="square">
+            <a:spAutoFit/>
+          </a:bodyPr>
+          <a:lstStyle/>
+          <a:p>
+            <a:r>
+              <a:rPr lang="en-IN" dirty="0"/>
+              <a:t>Left subtree values &lt; Root &lt; Right subtree values</a:t>
+            </a:r>
+          </a:p>
+        </p:txBody>
+      </p:sp>
+      <p:pic>
+        <p:nvPicPr>
+          <p:cNvPr id="8" name="Picture 7">
+            <a:extLst>
+              <a:ext uri="{FF2B5EF4-FFF2-40B4-BE49-F238E27FC236}">
+                <a16:creationId xmlns:a16="http://schemas.microsoft.com/office/drawing/2014/main" id="{A581B3A6-4564-CA93-828A-B8CC22D49099}"/>
+              </a:ext>
+            </a:extLst>
+          </p:cNvPr>
+          <p:cNvPicPr>
+            <a:picLocks noChangeAspect="1"/>
+          </p:cNvPicPr>
+          <p:nvPr/>
+        </p:nvPicPr>
+        <p:blipFill>
+          <a:blip r:embed="rId3"/>
+          <a:stretch>
+            <a:fillRect/>
+          </a:stretch>
+        </p:blipFill>
+        <p:spPr>
+          <a:xfrm>
+            <a:off x="5305314" y="3906171"/>
+            <a:ext cx="1581371" cy="1609950"/>
+          </a:xfrm>
+          <a:prstGeom prst="rect">
+            <a:avLst/>
+          </a:prstGeom>
+        </p:spPr>
+      </p:pic>
+      <p:pic>
+        <p:nvPicPr>
+          <p:cNvPr id="10" name="Picture 9">
+            <a:extLst>
+              <a:ext uri="{FF2B5EF4-FFF2-40B4-BE49-F238E27FC236}">
+                <a16:creationId xmlns:a16="http://schemas.microsoft.com/office/drawing/2014/main" id="{058177B2-0E6C-B3CF-9416-BE74CF757C8E}"/>
+              </a:ext>
+            </a:extLst>
+          </p:cNvPr>
+          <p:cNvPicPr>
+            <a:picLocks noChangeAspect="1"/>
+          </p:cNvPicPr>
+          <p:nvPr/>
+        </p:nvPicPr>
+        <p:blipFill>
+          <a:blip r:embed="rId4"/>
+          <a:stretch>
+            <a:fillRect/>
+          </a:stretch>
+        </p:blipFill>
+        <p:spPr>
+          <a:xfrm>
+            <a:off x="7773612" y="4021333"/>
+            <a:ext cx="3762900" cy="2238687"/>
+          </a:xfrm>
+          <a:prstGeom prst="rect">
+            <a:avLst/>
+          </a:prstGeom>
+          <a:ln>
+            <a:noFill/>
+          </a:ln>
+          <a:effectLst>
+            <a:outerShdw blurRad="292100" dist="139700" dir="2700000" algn="tl" rotWithShape="0">
+              <a:srgbClr val="333333">
+                <a:alpha val="65000"/>
+              </a:srgbClr>
+            </a:outerShdw>
+          </a:effectLst>
+        </p:spPr>
+      </p:pic>
+    </p:spTree>
+    <p:extLst>
+      <p:ext uri="{BB962C8B-B14F-4D97-AF65-F5344CB8AC3E}">
+        <p14:creationId xmlns:p14="http://schemas.microsoft.com/office/powerpoint/2010/main" val="3854794287"/>
+      </p:ext>
+    </p:extLst>
+  </p:cSld>
+  <p:clrMapOvr>
+    <a:masterClrMapping/>
+  </p:clrMapOvr>
+</p:sld>
+</file>
+
+<file path=ppt/slides/slide12.xml><?xml version="1.0" encoding="utf-8"?>
+<p:sld xmlns:a="http://schemas.openxmlformats.org/drawingml/2006/main" xmlns:r="http://schemas.openxmlformats.org/officeDocument/2006/relationships" xmlns:p="http://schemas.openxmlformats.org/presentationml/2006/main">
+  <p:cSld>
+    <p:bg>
+      <p:bgPr>
+        <a:solidFill>
+          <a:schemeClr val="bg1"/>
+        </a:solidFill>
+        <a:effectLst/>
+      </p:bgPr>
+    </p:bg>
+    <p:spTree>
+      <p:nvGrpSpPr>
+        <p:cNvPr id="1" name=""/>
+        <p:cNvGrpSpPr/>
+        <p:nvPr/>
+      </p:nvGrpSpPr>
+      <p:grpSpPr>
+        <a:xfrm>
+          <a:off x="0" y="0"/>
+          <a:ext cx="0" cy="0"/>
+          <a:chOff x="0" y="0"/>
+          <a:chExt cx="0" cy="0"/>
+        </a:xfrm>
+      </p:grpSpPr>
+      <p:sp useBgFill="1">
+        <p:nvSpPr>
+          <p:cNvPr id="8" name="Rectangle 7">
+            <a:extLst>
+              <a:ext uri="{FF2B5EF4-FFF2-40B4-BE49-F238E27FC236}">
+                <a16:creationId xmlns:a16="http://schemas.microsoft.com/office/drawing/2014/main" id="{AC477752-ACCA-41C1-9B1D-D0CED1F9CBDD}"/>
+              </a:ext>
+              <a:ext uri="{C183D7F6-B498-43B3-948B-1728B52AA6E4}">
+                <adec:decorative xmlns:adec="http://schemas.microsoft.com/office/drawing/2017/decorative" val="1"/>
+              </a:ext>
+            </a:extLst>
+          </p:cNvPr>
+          <p:cNvSpPr>
+            <a:spLocks noGrp="1" noRot="1" noChangeAspect="1" noMove="1" noResize="1" noEditPoints="1" noAdjustHandles="1" noChangeArrowheads="1" noChangeShapeType="1" noTextEdit="1"/>
+          </p:cNvSpPr>
+          <p:nvPr>
+            <p:extLst>
+              <p:ext uri="{386F3935-93C4-4BCD-93E2-E3B085C9AB24}">
+                <p16:designElem xmlns:p16="http://schemas.microsoft.com/office/powerpoint/2015/main" val="1"/>
+              </p:ext>
+            </p:extLst>
+          </p:nvPr>
+        </p:nvSpPr>
+        <p:spPr>
+          <a:xfrm>
+            <a:off x="-1" y="0"/>
+            <a:ext cx="12188952" cy="6858000"/>
+          </a:xfrm>
+          <a:prstGeom prst="rect">
+            <a:avLst/>
+          </a:prstGeom>
+          <a:ln>
+            <a:noFill/>
+          </a:ln>
+        </p:spPr>
+        <p:style>
+          <a:lnRef idx="2">
+            <a:schemeClr val="accent1">
+              <a:shade val="50000"/>
+            </a:schemeClr>
+          </a:lnRef>
+          <a:fillRef idx="1">
+            <a:schemeClr val="accent1"/>
+          </a:fillRef>
+          <a:effectRef idx="0">
+            <a:schemeClr val="accent1"/>
+          </a:effectRef>
+          <a:fontRef idx="minor">
+            <a:schemeClr val="lt1"/>
+          </a:fontRef>
+        </p:style>
+        <p:txBody>
+          <a:bodyPr rtlCol="0" anchor="ctr"/>
+          <a:lstStyle/>
+          <a:p>
+            <a:pPr algn="ctr"/>
+            <a:endParaRPr lang="en-US"/>
+          </a:p>
+        </p:txBody>
+      </p:sp>
+      <p:sp>
+        <p:nvSpPr>
+          <p:cNvPr id="2" name="Title 1">
+            <a:extLst>
+              <a:ext uri="{FF2B5EF4-FFF2-40B4-BE49-F238E27FC236}">
+                <a16:creationId xmlns:a16="http://schemas.microsoft.com/office/drawing/2014/main" id="{36A88E6C-0340-975D-FFDE-C570B8E93E99}"/>
+              </a:ext>
+            </a:extLst>
+          </p:cNvPr>
+          <p:cNvSpPr>
+            <a:spLocks noGrp="1"/>
+          </p:cNvSpPr>
+          <p:nvPr>
+            <p:ph type="title"/>
+          </p:nvPr>
+        </p:nvSpPr>
+        <p:spPr>
+          <a:xfrm>
+            <a:off x="838200" y="347664"/>
+            <a:ext cx="6163624" cy="1306475"/>
+          </a:xfrm>
+        </p:spPr>
+        <p:txBody>
+          <a:bodyPr vert="horz" lIns="91440" tIns="45720" rIns="91440" bIns="45720" rtlCol="0" anchor="ctr">
+            <a:normAutofit/>
+          </a:bodyPr>
+          <a:lstStyle/>
+          <a:p>
+            <a:r>
+              <a:rPr lang="en-US" sz="5200" kern="1200" dirty="0">
+                <a:solidFill>
+                  <a:schemeClr val="tx1"/>
+                </a:solidFill>
+                <a:latin typeface="+mj-lt"/>
+                <a:ea typeface="+mj-ea"/>
+                <a:cs typeface="+mj-cs"/>
+              </a:rPr>
+              <a:t>Comparison</a:t>
+            </a:r>
+          </a:p>
+        </p:txBody>
+      </p:sp>
+      <p:graphicFrame>
+        <p:nvGraphicFramePr>
+          <p:cNvPr id="3" name="Table 2">
+            <a:extLst>
+              <a:ext uri="{FF2B5EF4-FFF2-40B4-BE49-F238E27FC236}">
+                <a16:creationId xmlns:a16="http://schemas.microsoft.com/office/drawing/2014/main" id="{33F4172B-6EFF-CA8D-9657-F6B1A0B0AFC3}"/>
+              </a:ext>
+            </a:extLst>
+          </p:cNvPr>
+          <p:cNvGraphicFramePr>
+            <a:graphicFrameLocks noGrp="1"/>
+          </p:cNvGraphicFramePr>
+          <p:nvPr>
+            <p:extLst>
+              <p:ext uri="{D42A27DB-BD31-4B8C-83A1-F6EECF244321}">
+                <p14:modId xmlns:p14="http://schemas.microsoft.com/office/powerpoint/2010/main" val="1678815899"/>
+              </p:ext>
+            </p:extLst>
+          </p:nvPr>
+        </p:nvGraphicFramePr>
+        <p:xfrm>
+          <a:off x="838200" y="2313150"/>
+          <a:ext cx="10512549" cy="3514858"/>
+        </p:xfrm>
+        <a:graphic>
+          <a:graphicData uri="http://schemas.openxmlformats.org/drawingml/2006/table">
+            <a:tbl>
+              <a:tblPr>
+                <a:solidFill>
+                  <a:schemeClr val="bg1"/>
+                </a:solidFill>
+              </a:tblPr>
+              <a:tblGrid>
+                <a:gridCol w="1376377">
+                  <a:extLst>
+                    <a:ext uri="{9D8B030D-6E8A-4147-A177-3AD203B41FA5}">
+                      <a16:colId xmlns:a16="http://schemas.microsoft.com/office/drawing/2014/main" val="4071385200"/>
+                    </a:ext>
+                  </a:extLst>
+                </a:gridCol>
+                <a:gridCol w="3353369">
+                  <a:extLst>
+                    <a:ext uri="{9D8B030D-6E8A-4147-A177-3AD203B41FA5}">
+                      <a16:colId xmlns:a16="http://schemas.microsoft.com/office/drawing/2014/main" val="2217853609"/>
+                    </a:ext>
+                  </a:extLst>
+                </a:gridCol>
+                <a:gridCol w="3106604">
+                  <a:extLst>
+                    <a:ext uri="{9D8B030D-6E8A-4147-A177-3AD203B41FA5}">
+                      <a16:colId xmlns:a16="http://schemas.microsoft.com/office/drawing/2014/main" val="691369916"/>
+                    </a:ext>
+                  </a:extLst>
+                </a:gridCol>
+                <a:gridCol w="2676199">
+                  <a:extLst>
+                    <a:ext uri="{9D8B030D-6E8A-4147-A177-3AD203B41FA5}">
+                      <a16:colId xmlns:a16="http://schemas.microsoft.com/office/drawing/2014/main" val="3889819546"/>
+                    </a:ext>
+                  </a:extLst>
+                </a:gridCol>
+              </a:tblGrid>
+              <a:tr h="782304">
+                <a:tc>
+                  <a:txBody>
+                    <a:bodyPr/>
+                    <a:lstStyle/>
+                    <a:p>
+                      <a:pPr>
+                        <a:buNone/>
+                      </a:pPr>
+                      <a:r>
+                        <a:rPr lang="en-IN" sz="2500" cap="none" spc="0" dirty="0">
+                          <a:solidFill>
+                            <a:srgbClr val="0070C0"/>
+                          </a:solidFill>
+                        </a:rPr>
+                        <a:t>Topic</a:t>
+                      </a:r>
+                    </a:p>
+                  </a:txBody>
+                  <a:tcPr marL="214858" marR="165275" marT="165275" marB="165275" anchor="ctr">
+                    <a:lnL w="19050" cap="flat" cmpd="sng" algn="ctr">
+                      <a:solidFill>
+                        <a:schemeClr val="tx1"/>
+                      </a:solidFill>
+                      <a:prstDash val="solid"/>
+                    </a:lnL>
+                    <a:lnR w="6350" cap="flat" cmpd="sng" algn="ctr">
+                      <a:solidFill>
+                        <a:schemeClr val="tx1">
+                          <a:lumMod val="50000"/>
+                          <a:lumOff val="50000"/>
+                        </a:schemeClr>
+                      </a:solidFill>
+                      <a:prstDash val="solid"/>
+                    </a:lnR>
+                    <a:lnT w="19050" cap="flat" cmpd="sng" algn="ctr">
+                      <a:solidFill>
+                        <a:schemeClr val="tx1"/>
+                      </a:solidFill>
+                      <a:prstDash val="solid"/>
+                    </a:lnT>
+                    <a:lnB w="6350" cap="flat" cmpd="sng" algn="ctr">
+                      <a:solidFill>
+                        <a:schemeClr val="tx1">
+                          <a:lumMod val="50000"/>
+                          <a:lumOff val="50000"/>
+                        </a:schemeClr>
+                      </a:solidFill>
+                      <a:prstDash val="solid"/>
+                    </a:lnB>
+                    <a:noFill/>
+                  </a:tcPr>
+                </a:tc>
+                <a:tc>
+                  <a:txBody>
+                    <a:bodyPr/>
+                    <a:lstStyle/>
+                    <a:p>
+                      <a:pPr>
+                        <a:buNone/>
+                      </a:pPr>
+                      <a:r>
+                        <a:rPr lang="en-IN" sz="2500" cap="none" spc="0" dirty="0">
+                          <a:solidFill>
+                            <a:srgbClr val="0070C0"/>
+                          </a:solidFill>
+                        </a:rPr>
+                        <a:t>Full Form</a:t>
+                      </a:r>
+                    </a:p>
+                  </a:txBody>
+                  <a:tcPr marL="214858" marR="165275" marT="165275" marB="165275" anchor="ctr">
+                    <a:lnL w="6350" cap="flat" cmpd="sng" algn="ctr">
+                      <a:solidFill>
+                        <a:schemeClr val="tx1">
+                          <a:lumMod val="50000"/>
+                          <a:lumOff val="50000"/>
+                        </a:schemeClr>
+                      </a:solidFill>
+                      <a:prstDash val="solid"/>
+                    </a:lnL>
+                    <a:lnR w="6350" cap="flat" cmpd="sng" algn="ctr">
+                      <a:solidFill>
+                        <a:schemeClr val="tx1">
+                          <a:lumMod val="50000"/>
+                          <a:lumOff val="50000"/>
+                        </a:schemeClr>
+                      </a:solidFill>
+                      <a:prstDash val="solid"/>
+                    </a:lnR>
+                    <a:lnT w="19050" cap="flat" cmpd="sng" algn="ctr">
+                      <a:solidFill>
+                        <a:schemeClr val="tx1"/>
+                      </a:solidFill>
+                      <a:prstDash val="solid"/>
+                    </a:lnT>
+                    <a:lnB w="6350" cap="flat" cmpd="sng" algn="ctr">
+                      <a:solidFill>
+                        <a:schemeClr val="tx1">
+                          <a:lumMod val="50000"/>
+                          <a:lumOff val="50000"/>
+                        </a:schemeClr>
+                      </a:solidFill>
+                      <a:prstDash val="solid"/>
+                    </a:lnB>
+                    <a:noFill/>
+                  </a:tcPr>
+                </a:tc>
+                <a:tc>
+                  <a:txBody>
+                    <a:bodyPr/>
+                    <a:lstStyle/>
+                    <a:p>
+                      <a:pPr>
+                        <a:buNone/>
+                      </a:pPr>
+                      <a:r>
+                        <a:rPr lang="en-IN" sz="2500" cap="none" spc="0" dirty="0">
+                          <a:solidFill>
+                            <a:srgbClr val="0070C0"/>
+                          </a:solidFill>
+                        </a:rPr>
+                        <a:t>Structure Used</a:t>
+                      </a:r>
+                    </a:p>
+                  </a:txBody>
+                  <a:tcPr marL="214858" marR="165275" marT="165275" marB="165275" anchor="ctr">
+                    <a:lnL w="6350" cap="flat" cmpd="sng" algn="ctr">
+                      <a:solidFill>
+                        <a:schemeClr val="tx1">
+                          <a:lumMod val="50000"/>
+                          <a:lumOff val="50000"/>
+                        </a:schemeClr>
+                      </a:solidFill>
+                      <a:prstDash val="solid"/>
+                    </a:lnL>
+                    <a:lnR w="6350" cap="flat" cmpd="sng" algn="ctr">
+                      <a:solidFill>
+                        <a:schemeClr val="tx1">
+                          <a:lumMod val="50000"/>
+                          <a:lumOff val="50000"/>
+                        </a:schemeClr>
+                      </a:solidFill>
+                      <a:prstDash val="solid"/>
+                    </a:lnR>
+                    <a:lnT w="19050" cap="flat" cmpd="sng" algn="ctr">
+                      <a:solidFill>
+                        <a:schemeClr val="tx1"/>
+                      </a:solidFill>
+                      <a:prstDash val="solid"/>
+                    </a:lnT>
+                    <a:lnB w="6350" cap="flat" cmpd="sng" algn="ctr">
+                      <a:solidFill>
+                        <a:schemeClr val="tx1">
+                          <a:lumMod val="50000"/>
+                          <a:lumOff val="50000"/>
+                        </a:schemeClr>
+                      </a:solidFill>
+                      <a:prstDash val="solid"/>
+                    </a:lnB>
+                    <a:noFill/>
+                  </a:tcPr>
+                </a:tc>
+                <a:tc>
+                  <a:txBody>
+                    <a:bodyPr/>
+                    <a:lstStyle/>
+                    <a:p>
+                      <a:pPr>
+                        <a:buNone/>
+                      </a:pPr>
+                      <a:r>
+                        <a:rPr lang="en-IN" sz="2500" cap="none" spc="0" dirty="0">
+                          <a:solidFill>
+                            <a:srgbClr val="0070C0"/>
+                          </a:solidFill>
+                        </a:rPr>
+                        <a:t>Best For</a:t>
+                      </a:r>
+                    </a:p>
+                  </a:txBody>
+                  <a:tcPr marL="214858" marR="165275" marT="165275" marB="165275" anchor="ctr">
+                    <a:lnL w="6350" cap="flat" cmpd="sng" algn="ctr">
+                      <a:solidFill>
+                        <a:schemeClr val="tx1">
+                          <a:lumMod val="50000"/>
+                          <a:lumOff val="50000"/>
+                        </a:schemeClr>
+                      </a:solidFill>
+                      <a:prstDash val="solid"/>
+                    </a:lnL>
+                    <a:lnR w="19050" cap="flat" cmpd="sng" algn="ctr">
+                      <a:solidFill>
+                        <a:schemeClr val="tx1"/>
+                      </a:solidFill>
+                      <a:prstDash val="solid"/>
+                    </a:lnR>
+                    <a:lnT w="19050" cap="flat" cmpd="sng" algn="ctr">
+                      <a:solidFill>
+                        <a:schemeClr val="tx1"/>
+                      </a:solidFill>
+                      <a:prstDash val="solid"/>
+                    </a:lnT>
+                    <a:lnB w="6350" cap="flat" cmpd="sng" algn="ctr">
+                      <a:solidFill>
+                        <a:schemeClr val="tx1">
+                          <a:lumMod val="50000"/>
+                          <a:lumOff val="50000"/>
+                        </a:schemeClr>
+                      </a:solidFill>
+                      <a:prstDash val="solid"/>
+                    </a:lnB>
+                    <a:noFill/>
+                  </a:tcPr>
+                </a:tc>
+                <a:extLst>
+                  <a:ext uri="{0D108BD9-81ED-4DB2-BD59-A6C34878D82A}">
+                    <a16:rowId xmlns:a16="http://schemas.microsoft.com/office/drawing/2014/main" val="3342767519"/>
+                  </a:ext>
+                </a:extLst>
+              </a:tr>
+              <a:tr h="782304">
+                <a:tc>
+                  <a:txBody>
+                    <a:bodyPr/>
+                    <a:lstStyle/>
+                    <a:p>
+                      <a:pPr>
+                        <a:buNone/>
+                      </a:pPr>
+                      <a:r>
+                        <a:rPr lang="en-IN" sz="2500" cap="none" spc="0">
+                          <a:solidFill>
+                            <a:schemeClr val="tx1"/>
+                          </a:solidFill>
+                        </a:rPr>
+                        <a:t>DFS</a:t>
+                      </a:r>
+                    </a:p>
+                  </a:txBody>
+                  <a:tcPr marL="214858" marR="165275" marT="165275" marB="165275" anchor="ctr">
+                    <a:lnL w="19050" cap="flat" cmpd="sng" algn="ctr">
+                      <a:solidFill>
+                        <a:schemeClr val="tx1"/>
+                      </a:solidFill>
+                      <a:prstDash val="solid"/>
+                    </a:lnL>
+                    <a:lnR w="6350" cap="flat" cmpd="sng" algn="ctr">
+                      <a:solidFill>
+                        <a:schemeClr val="tx1">
+                          <a:lumMod val="50000"/>
+                          <a:lumOff val="50000"/>
+                        </a:schemeClr>
+                      </a:solidFill>
+                      <a:prstDash val="solid"/>
+                    </a:lnR>
+                    <a:lnT w="6350" cap="flat" cmpd="sng" algn="ctr">
+                      <a:solidFill>
+                        <a:schemeClr val="tx1">
+                          <a:lumMod val="50000"/>
+                          <a:lumOff val="50000"/>
+                        </a:schemeClr>
+                      </a:solidFill>
+                      <a:prstDash val="solid"/>
+                    </a:lnT>
+                    <a:lnB w="6350" cap="flat" cmpd="sng" algn="ctr">
+                      <a:solidFill>
+                        <a:schemeClr val="tx1">
+                          <a:lumMod val="50000"/>
+                          <a:lumOff val="50000"/>
+                        </a:schemeClr>
+                      </a:solidFill>
+                      <a:prstDash val="solid"/>
+                    </a:lnB>
+                    <a:noFill/>
+                  </a:tcPr>
+                </a:tc>
+                <a:tc>
+                  <a:txBody>
+                    <a:bodyPr/>
+                    <a:lstStyle/>
+                    <a:p>
+                      <a:pPr>
+                        <a:buNone/>
+                      </a:pPr>
+                      <a:r>
+                        <a:rPr lang="en-IN" sz="2500" cap="none" spc="0">
+                          <a:solidFill>
+                            <a:schemeClr val="tx1"/>
+                          </a:solidFill>
+                        </a:rPr>
+                        <a:t>Depth First Search</a:t>
+                      </a:r>
+                    </a:p>
+                  </a:txBody>
+                  <a:tcPr marL="214858" marR="165275" marT="165275" marB="165275" anchor="ctr">
+                    <a:lnL w="6350" cap="flat" cmpd="sng" algn="ctr">
+                      <a:solidFill>
+                        <a:schemeClr val="tx1">
+                          <a:lumMod val="50000"/>
+                          <a:lumOff val="50000"/>
+                        </a:schemeClr>
+                      </a:solidFill>
+                      <a:prstDash val="solid"/>
+                    </a:lnL>
+                    <a:lnR w="6350" cap="flat" cmpd="sng" algn="ctr">
+                      <a:solidFill>
+                        <a:schemeClr val="tx1">
+                          <a:lumMod val="50000"/>
+                          <a:lumOff val="50000"/>
+                        </a:schemeClr>
+                      </a:solidFill>
+                      <a:prstDash val="solid"/>
+                    </a:lnR>
+                    <a:lnT w="6350" cap="flat" cmpd="sng" algn="ctr">
+                      <a:solidFill>
+                        <a:schemeClr val="tx1">
+                          <a:lumMod val="50000"/>
+                          <a:lumOff val="50000"/>
+                        </a:schemeClr>
+                      </a:solidFill>
+                      <a:prstDash val="solid"/>
+                    </a:lnT>
+                    <a:lnB w="6350" cap="flat" cmpd="sng" algn="ctr">
+                      <a:solidFill>
+                        <a:schemeClr val="tx1">
+                          <a:lumMod val="50000"/>
+                          <a:lumOff val="50000"/>
+                        </a:schemeClr>
+                      </a:solidFill>
+                      <a:prstDash val="solid"/>
+                    </a:lnB>
+                    <a:noFill/>
+                  </a:tcPr>
+                </a:tc>
+                <a:tc>
+                  <a:txBody>
+                    <a:bodyPr/>
+                    <a:lstStyle/>
+                    <a:p>
+                      <a:pPr>
+                        <a:buNone/>
+                      </a:pPr>
+                      <a:r>
+                        <a:rPr lang="en-IN" sz="2500" cap="none" spc="0">
+                          <a:solidFill>
+                            <a:schemeClr val="tx1"/>
+                          </a:solidFill>
+                        </a:rPr>
+                        <a:t>Stack / Recursion</a:t>
+                      </a:r>
+                    </a:p>
+                  </a:txBody>
+                  <a:tcPr marL="214858" marR="165275" marT="165275" marB="165275" anchor="ctr">
+                    <a:lnL w="6350" cap="flat" cmpd="sng" algn="ctr">
+                      <a:solidFill>
+                        <a:schemeClr val="tx1">
+                          <a:lumMod val="50000"/>
+                          <a:lumOff val="50000"/>
+                        </a:schemeClr>
+                      </a:solidFill>
+                      <a:prstDash val="solid"/>
+                    </a:lnL>
+                    <a:lnR w="6350" cap="flat" cmpd="sng" algn="ctr">
+                      <a:solidFill>
+                        <a:schemeClr val="tx1">
+                          <a:lumMod val="50000"/>
+                          <a:lumOff val="50000"/>
+                        </a:schemeClr>
+                      </a:solidFill>
+                      <a:prstDash val="solid"/>
+                    </a:lnR>
+                    <a:lnT w="6350" cap="flat" cmpd="sng" algn="ctr">
+                      <a:solidFill>
+                        <a:schemeClr val="tx1">
+                          <a:lumMod val="50000"/>
+                          <a:lumOff val="50000"/>
+                        </a:schemeClr>
+                      </a:solidFill>
+                      <a:prstDash val="solid"/>
+                    </a:lnT>
+                    <a:lnB w="6350" cap="flat" cmpd="sng" algn="ctr">
+                      <a:solidFill>
+                        <a:schemeClr val="tx1">
+                          <a:lumMod val="50000"/>
+                          <a:lumOff val="50000"/>
+                        </a:schemeClr>
+                      </a:solidFill>
+                      <a:prstDash val="solid"/>
+                    </a:lnB>
+                    <a:noFill/>
+                  </a:tcPr>
+                </a:tc>
+                <a:tc>
+                  <a:txBody>
+                    <a:bodyPr/>
+                    <a:lstStyle/>
+                    <a:p>
+                      <a:pPr>
+                        <a:buNone/>
+                      </a:pPr>
+                      <a:r>
+                        <a:rPr lang="en-IN" sz="2500" cap="none" spc="0">
+                          <a:solidFill>
+                            <a:schemeClr val="tx1"/>
+                          </a:solidFill>
+                        </a:rPr>
+                        <a:t>Deep traversal</a:t>
+                      </a:r>
+                    </a:p>
+                  </a:txBody>
+                  <a:tcPr marL="214858" marR="165275" marT="165275" marB="165275" anchor="ctr">
+                    <a:lnL w="6350" cap="flat" cmpd="sng" algn="ctr">
+                      <a:solidFill>
+                        <a:schemeClr val="tx1">
+                          <a:lumMod val="50000"/>
+                          <a:lumOff val="50000"/>
+                        </a:schemeClr>
+                      </a:solidFill>
+                      <a:prstDash val="solid"/>
+                    </a:lnL>
+                    <a:lnR w="19050" cap="flat" cmpd="sng" algn="ctr">
+                      <a:solidFill>
+                        <a:schemeClr val="tx1"/>
+                      </a:solidFill>
+                      <a:prstDash val="solid"/>
+                    </a:lnR>
+                    <a:lnT w="6350" cap="flat" cmpd="sng" algn="ctr">
+                      <a:solidFill>
+                        <a:schemeClr val="tx1">
+                          <a:lumMod val="50000"/>
+                          <a:lumOff val="50000"/>
+                        </a:schemeClr>
+                      </a:solidFill>
+                      <a:prstDash val="solid"/>
+                    </a:lnT>
+                    <a:lnB w="6350" cap="flat" cmpd="sng" algn="ctr">
+                      <a:solidFill>
+                        <a:schemeClr val="tx1">
+                          <a:lumMod val="50000"/>
+                          <a:lumOff val="50000"/>
+                        </a:schemeClr>
+                      </a:solidFill>
+                      <a:prstDash val="solid"/>
+                    </a:lnB>
+                    <a:noFill/>
+                  </a:tcPr>
+                </a:tc>
+                <a:extLst>
+                  <a:ext uri="{0D108BD9-81ED-4DB2-BD59-A6C34878D82A}">
+                    <a16:rowId xmlns:a16="http://schemas.microsoft.com/office/drawing/2014/main" val="1360089939"/>
+                  </a:ext>
+                </a:extLst>
+              </a:tr>
+              <a:tr h="1167946">
+                <a:tc>
+                  <a:txBody>
+                    <a:bodyPr/>
+                    <a:lstStyle/>
+                    <a:p>
+                      <a:pPr>
+                        <a:buNone/>
+                      </a:pPr>
+                      <a:r>
+                        <a:rPr lang="en-IN" sz="2500" cap="none" spc="0">
+                          <a:solidFill>
+                            <a:schemeClr val="tx1"/>
+                          </a:solidFill>
+                        </a:rPr>
+                        <a:t>BFS</a:t>
+                      </a:r>
+                    </a:p>
+                  </a:txBody>
+                  <a:tcPr marL="214858" marR="165275" marT="165275" marB="165275" anchor="ctr">
+                    <a:lnL w="19050" cap="flat" cmpd="sng" algn="ctr">
+                      <a:solidFill>
+                        <a:schemeClr val="tx1"/>
+                      </a:solidFill>
+                      <a:prstDash val="solid"/>
+                    </a:lnL>
+                    <a:lnR w="6350" cap="flat" cmpd="sng" algn="ctr">
+                      <a:solidFill>
+                        <a:schemeClr val="tx1">
+                          <a:lumMod val="50000"/>
+                          <a:lumOff val="50000"/>
+                        </a:schemeClr>
+                      </a:solidFill>
+                      <a:prstDash val="solid"/>
+                    </a:lnR>
+                    <a:lnT w="6350" cap="flat" cmpd="sng" algn="ctr">
+                      <a:solidFill>
+                        <a:schemeClr val="tx1">
+                          <a:lumMod val="50000"/>
+                          <a:lumOff val="50000"/>
+                        </a:schemeClr>
+                      </a:solidFill>
+                      <a:prstDash val="solid"/>
+                    </a:lnT>
+                    <a:lnB w="6350" cap="flat" cmpd="sng" algn="ctr">
+                      <a:solidFill>
+                        <a:schemeClr val="tx1">
+                          <a:lumMod val="50000"/>
+                          <a:lumOff val="50000"/>
+                        </a:schemeClr>
+                      </a:solidFill>
+                      <a:prstDash val="solid"/>
+                    </a:lnB>
+                    <a:noFill/>
+                  </a:tcPr>
+                </a:tc>
+                <a:tc>
+                  <a:txBody>
+                    <a:bodyPr/>
+                    <a:lstStyle/>
+                    <a:p>
+                      <a:pPr>
+                        <a:buNone/>
+                      </a:pPr>
+                      <a:r>
+                        <a:rPr lang="en-IN" sz="2500" cap="none" spc="0">
+                          <a:solidFill>
+                            <a:schemeClr val="tx1"/>
+                          </a:solidFill>
+                        </a:rPr>
+                        <a:t>Breadth First Search</a:t>
+                      </a:r>
+                    </a:p>
+                  </a:txBody>
+                  <a:tcPr marL="214858" marR="165275" marT="165275" marB="165275" anchor="ctr">
+                    <a:lnL w="6350" cap="flat" cmpd="sng" algn="ctr">
+                      <a:solidFill>
+                        <a:schemeClr val="tx1">
+                          <a:lumMod val="50000"/>
+                          <a:lumOff val="50000"/>
+                        </a:schemeClr>
+                      </a:solidFill>
+                      <a:prstDash val="solid"/>
+                    </a:lnL>
+                    <a:lnR w="6350" cap="flat" cmpd="sng" algn="ctr">
+                      <a:solidFill>
+                        <a:schemeClr val="tx1">
+                          <a:lumMod val="50000"/>
+                          <a:lumOff val="50000"/>
+                        </a:schemeClr>
+                      </a:solidFill>
+                      <a:prstDash val="solid"/>
+                    </a:lnR>
+                    <a:lnT w="6350" cap="flat" cmpd="sng" algn="ctr">
+                      <a:solidFill>
+                        <a:schemeClr val="tx1">
+                          <a:lumMod val="50000"/>
+                          <a:lumOff val="50000"/>
+                        </a:schemeClr>
+                      </a:solidFill>
+                      <a:prstDash val="solid"/>
+                    </a:lnT>
+                    <a:lnB w="6350" cap="flat" cmpd="sng" algn="ctr">
+                      <a:solidFill>
+                        <a:schemeClr val="tx1">
+                          <a:lumMod val="50000"/>
+                          <a:lumOff val="50000"/>
+                        </a:schemeClr>
+                      </a:solidFill>
+                      <a:prstDash val="solid"/>
+                    </a:lnB>
+                    <a:noFill/>
+                  </a:tcPr>
+                </a:tc>
+                <a:tc>
+                  <a:txBody>
+                    <a:bodyPr/>
+                    <a:lstStyle/>
+                    <a:p>
+                      <a:pPr>
+                        <a:buNone/>
+                      </a:pPr>
+                      <a:r>
+                        <a:rPr lang="en-IN" sz="2500" cap="none" spc="0">
+                          <a:solidFill>
+                            <a:schemeClr val="tx1"/>
+                          </a:solidFill>
+                        </a:rPr>
+                        <a:t>Queue</a:t>
+                      </a:r>
+                    </a:p>
+                  </a:txBody>
+                  <a:tcPr marL="214858" marR="165275" marT="165275" marB="165275" anchor="ctr">
+                    <a:lnL w="6350" cap="flat" cmpd="sng" algn="ctr">
+                      <a:solidFill>
+                        <a:schemeClr val="tx1">
+                          <a:lumMod val="50000"/>
+                          <a:lumOff val="50000"/>
+                        </a:schemeClr>
+                      </a:solidFill>
+                      <a:prstDash val="solid"/>
+                    </a:lnL>
+                    <a:lnR w="6350" cap="flat" cmpd="sng" algn="ctr">
+                      <a:solidFill>
+                        <a:schemeClr val="tx1">
+                          <a:lumMod val="50000"/>
+                          <a:lumOff val="50000"/>
+                        </a:schemeClr>
+                      </a:solidFill>
+                      <a:prstDash val="solid"/>
+                    </a:lnR>
+                    <a:lnT w="6350" cap="flat" cmpd="sng" algn="ctr">
+                      <a:solidFill>
+                        <a:schemeClr val="tx1">
+                          <a:lumMod val="50000"/>
+                          <a:lumOff val="50000"/>
+                        </a:schemeClr>
+                      </a:solidFill>
+                      <a:prstDash val="solid"/>
+                    </a:lnT>
+                    <a:lnB w="6350" cap="flat" cmpd="sng" algn="ctr">
+                      <a:solidFill>
+                        <a:schemeClr val="tx1">
+                          <a:lumMod val="50000"/>
+                          <a:lumOff val="50000"/>
+                        </a:schemeClr>
+                      </a:solidFill>
+                      <a:prstDash val="solid"/>
+                    </a:lnB>
+                    <a:noFill/>
+                  </a:tcPr>
+                </a:tc>
+                <a:tc>
+                  <a:txBody>
+                    <a:bodyPr/>
+                    <a:lstStyle/>
+                    <a:p>
+                      <a:pPr>
+                        <a:buNone/>
+                      </a:pPr>
+                      <a:r>
+                        <a:rPr lang="en-IN" sz="2500" cap="none" spc="0">
+                          <a:solidFill>
+                            <a:schemeClr val="tx1"/>
+                          </a:solidFill>
+                        </a:rPr>
+                        <a:t>Level-wise traversal</a:t>
+                      </a:r>
+                    </a:p>
+                  </a:txBody>
+                  <a:tcPr marL="214858" marR="165275" marT="165275" marB="165275" anchor="ctr">
+                    <a:lnL w="6350" cap="flat" cmpd="sng" algn="ctr">
+                      <a:solidFill>
+                        <a:schemeClr val="tx1">
+                          <a:lumMod val="50000"/>
+                          <a:lumOff val="50000"/>
+                        </a:schemeClr>
+                      </a:solidFill>
+                      <a:prstDash val="solid"/>
+                    </a:lnL>
+                    <a:lnR w="19050" cap="flat" cmpd="sng" algn="ctr">
+                      <a:solidFill>
+                        <a:schemeClr val="tx1"/>
+                      </a:solidFill>
+                      <a:prstDash val="solid"/>
+                    </a:lnR>
+                    <a:lnT w="6350" cap="flat" cmpd="sng" algn="ctr">
+                      <a:solidFill>
+                        <a:schemeClr val="tx1">
+                          <a:lumMod val="50000"/>
+                          <a:lumOff val="50000"/>
+                        </a:schemeClr>
+                      </a:solidFill>
+                      <a:prstDash val="solid"/>
+                    </a:lnT>
+                    <a:lnB w="6350" cap="flat" cmpd="sng" algn="ctr">
+                      <a:solidFill>
+                        <a:schemeClr val="tx1">
+                          <a:lumMod val="50000"/>
+                          <a:lumOff val="50000"/>
+                        </a:schemeClr>
+                      </a:solidFill>
+                      <a:prstDash val="solid"/>
+                    </a:lnB>
+                    <a:noFill/>
+                  </a:tcPr>
+                </a:tc>
+                <a:extLst>
+                  <a:ext uri="{0D108BD9-81ED-4DB2-BD59-A6C34878D82A}">
+                    <a16:rowId xmlns:a16="http://schemas.microsoft.com/office/drawing/2014/main" val="3434844980"/>
+                  </a:ext>
+                </a:extLst>
+              </a:tr>
+              <a:tr h="782304">
+                <a:tc>
+                  <a:txBody>
+                    <a:bodyPr/>
+                    <a:lstStyle/>
+                    <a:p>
+                      <a:pPr>
+                        <a:buNone/>
+                      </a:pPr>
+                      <a:r>
+                        <a:rPr lang="en-IN" sz="2500" cap="none" spc="0">
+                          <a:solidFill>
+                            <a:schemeClr val="tx1"/>
+                          </a:solidFill>
+                        </a:rPr>
+                        <a:t>BST</a:t>
+                      </a:r>
+                    </a:p>
+                  </a:txBody>
+                  <a:tcPr marL="214858" marR="165275" marT="165275" marB="165275" anchor="ctr">
+                    <a:lnL w="19050" cap="flat" cmpd="sng" algn="ctr">
+                      <a:solidFill>
+                        <a:schemeClr val="tx1"/>
+                      </a:solidFill>
+                      <a:prstDash val="solid"/>
+                    </a:lnL>
+                    <a:lnR w="6350" cap="flat" cmpd="sng" algn="ctr">
+                      <a:solidFill>
+                        <a:schemeClr val="tx1">
+                          <a:lumMod val="50000"/>
+                          <a:lumOff val="50000"/>
+                        </a:schemeClr>
+                      </a:solidFill>
+                      <a:prstDash val="solid"/>
+                    </a:lnR>
+                    <a:lnT w="6350" cap="flat" cmpd="sng" algn="ctr">
+                      <a:solidFill>
+                        <a:schemeClr val="tx1">
+                          <a:lumMod val="50000"/>
+                          <a:lumOff val="50000"/>
+                        </a:schemeClr>
+                      </a:solidFill>
+                      <a:prstDash val="solid"/>
+                    </a:lnT>
+                    <a:lnB w="19050" cap="flat" cmpd="sng" algn="ctr">
+                      <a:solidFill>
+                        <a:schemeClr val="tx1"/>
+                      </a:solidFill>
+                      <a:prstDash val="solid"/>
+                    </a:lnB>
+                    <a:noFill/>
+                  </a:tcPr>
+                </a:tc>
+                <a:tc>
+                  <a:txBody>
+                    <a:bodyPr/>
+                    <a:lstStyle/>
+                    <a:p>
+                      <a:pPr>
+                        <a:buNone/>
+                      </a:pPr>
+                      <a:r>
+                        <a:rPr lang="en-IN" sz="2500" cap="none" spc="0">
+                          <a:solidFill>
+                            <a:schemeClr val="tx1"/>
+                          </a:solidFill>
+                        </a:rPr>
+                        <a:t>Binary Search Tree</a:t>
+                      </a:r>
+                    </a:p>
+                  </a:txBody>
+                  <a:tcPr marL="214858" marR="165275" marT="165275" marB="165275" anchor="ctr">
+                    <a:lnL w="6350" cap="flat" cmpd="sng" algn="ctr">
+                      <a:solidFill>
+                        <a:schemeClr val="tx1">
+                          <a:lumMod val="50000"/>
+                          <a:lumOff val="50000"/>
+                        </a:schemeClr>
+                      </a:solidFill>
+                      <a:prstDash val="solid"/>
+                    </a:lnL>
+                    <a:lnR w="6350" cap="flat" cmpd="sng" algn="ctr">
+                      <a:solidFill>
+                        <a:schemeClr val="tx1">
+                          <a:lumMod val="50000"/>
+                          <a:lumOff val="50000"/>
+                        </a:schemeClr>
+                      </a:solidFill>
+                      <a:prstDash val="solid"/>
+                    </a:lnR>
+                    <a:lnT w="6350" cap="flat" cmpd="sng" algn="ctr">
+                      <a:solidFill>
+                        <a:schemeClr val="tx1">
+                          <a:lumMod val="50000"/>
+                          <a:lumOff val="50000"/>
+                        </a:schemeClr>
+                      </a:solidFill>
+                      <a:prstDash val="solid"/>
+                    </a:lnT>
+                    <a:lnB w="19050" cap="flat" cmpd="sng" algn="ctr">
+                      <a:solidFill>
+                        <a:schemeClr val="tx1"/>
+                      </a:solidFill>
+                      <a:prstDash val="solid"/>
+                    </a:lnB>
+                    <a:noFill/>
+                  </a:tcPr>
+                </a:tc>
+                <a:tc>
+                  <a:txBody>
+                    <a:bodyPr/>
+                    <a:lstStyle/>
+                    <a:p>
+                      <a:pPr>
+                        <a:buNone/>
+                      </a:pPr>
+                      <a:r>
+                        <a:rPr lang="en-IN" sz="2500" cap="none" spc="0">
+                          <a:solidFill>
+                            <a:schemeClr val="tx1"/>
+                          </a:solidFill>
+                        </a:rPr>
+                        <a:t>Tree with order</a:t>
+                      </a:r>
+                    </a:p>
+                  </a:txBody>
+                  <a:tcPr marL="214858" marR="165275" marT="165275" marB="165275" anchor="ctr">
+                    <a:lnL w="6350" cap="flat" cmpd="sng" algn="ctr">
+                      <a:solidFill>
+                        <a:schemeClr val="tx1">
+                          <a:lumMod val="50000"/>
+                          <a:lumOff val="50000"/>
+                        </a:schemeClr>
+                      </a:solidFill>
+                      <a:prstDash val="solid"/>
+                    </a:lnL>
+                    <a:lnR w="6350" cap="flat" cmpd="sng" algn="ctr">
+                      <a:solidFill>
+                        <a:schemeClr val="tx1">
+                          <a:lumMod val="50000"/>
+                          <a:lumOff val="50000"/>
+                        </a:schemeClr>
+                      </a:solidFill>
+                      <a:prstDash val="solid"/>
+                    </a:lnR>
+                    <a:lnT w="6350" cap="flat" cmpd="sng" algn="ctr">
+                      <a:solidFill>
+                        <a:schemeClr val="tx1">
+                          <a:lumMod val="50000"/>
+                          <a:lumOff val="50000"/>
+                        </a:schemeClr>
+                      </a:solidFill>
+                      <a:prstDash val="solid"/>
+                    </a:lnT>
+                    <a:lnB w="19050" cap="flat" cmpd="sng" algn="ctr">
+                      <a:solidFill>
+                        <a:schemeClr val="tx1"/>
+                      </a:solidFill>
+                      <a:prstDash val="solid"/>
+                    </a:lnB>
+                    <a:noFill/>
+                  </a:tcPr>
+                </a:tc>
+                <a:tc>
+                  <a:txBody>
+                    <a:bodyPr/>
+                    <a:lstStyle/>
+                    <a:p>
+                      <a:pPr>
+                        <a:buNone/>
+                      </a:pPr>
+                      <a:r>
+                        <a:rPr lang="en-IN" sz="2500" cap="none" spc="0" dirty="0">
+                          <a:solidFill>
+                            <a:schemeClr val="tx1"/>
+                          </a:solidFill>
+                        </a:rPr>
+                        <a:t>Fast search</a:t>
+                      </a:r>
+                    </a:p>
+                  </a:txBody>
+                  <a:tcPr marL="214858" marR="165275" marT="165275" marB="165275" anchor="ctr">
+                    <a:lnL w="6350" cap="flat" cmpd="sng" algn="ctr">
+                      <a:solidFill>
+                        <a:schemeClr val="tx1">
+                          <a:lumMod val="50000"/>
+                          <a:lumOff val="50000"/>
+                        </a:schemeClr>
+                      </a:solidFill>
+                      <a:prstDash val="solid"/>
+                    </a:lnL>
+                    <a:lnR w="19050" cap="flat" cmpd="sng" algn="ctr">
+                      <a:solidFill>
+                        <a:schemeClr val="tx1"/>
+                      </a:solidFill>
+                      <a:prstDash val="solid"/>
+                    </a:lnR>
+                    <a:lnT w="6350" cap="flat" cmpd="sng" algn="ctr">
+                      <a:solidFill>
+                        <a:schemeClr val="tx1">
+                          <a:lumMod val="50000"/>
+                          <a:lumOff val="50000"/>
+                        </a:schemeClr>
+                      </a:solidFill>
+                      <a:prstDash val="solid"/>
+                    </a:lnT>
+                    <a:lnB w="19050" cap="flat" cmpd="sng" algn="ctr">
+                      <a:solidFill>
+                        <a:schemeClr val="tx1"/>
+                      </a:solidFill>
+                      <a:prstDash val="solid"/>
+                    </a:lnB>
+                    <a:noFill/>
+                  </a:tcPr>
+                </a:tc>
+                <a:extLst>
+                  <a:ext uri="{0D108BD9-81ED-4DB2-BD59-A6C34878D82A}">
+                    <a16:rowId xmlns:a16="http://schemas.microsoft.com/office/drawing/2014/main" val="3502109613"/>
+                  </a:ext>
+                </a:extLst>
+              </a:tr>
+            </a:tbl>
+          </a:graphicData>
+        </a:graphic>
+      </p:graphicFrame>
+    </p:spTree>
+    <p:extLst>
+      <p:ext uri="{BB962C8B-B14F-4D97-AF65-F5344CB8AC3E}">
+        <p14:creationId xmlns:p14="http://schemas.microsoft.com/office/powerpoint/2010/main" val="1324494571"/>
+      </p:ext>
+    </p:extLst>
+  </p:cSld>
+  <p:clrMapOvr>
+    <a:masterClrMapping/>
+  </p:clrMapOvr>
+</p:sld>
+</file>
+
+<file path=ppt/slides/slide13.xml><?xml version="1.0" encoding="utf-8"?>
+<p:sld xmlns:a="http://schemas.openxmlformats.org/drawingml/2006/main" xmlns:r="http://schemas.openxmlformats.org/officeDocument/2006/relationships" xmlns:p="http://schemas.openxmlformats.org/presentationml/2006/main">
+  <p:cSld>
+    <p:bg>
+      <p:bgPr>
+        <a:solidFill>
+          <a:schemeClr val="bg1"/>
+        </a:solidFill>
+        <a:effectLst/>
+      </p:bgPr>
+    </p:bg>
+    <p:spTree>
+      <p:nvGrpSpPr>
+        <p:cNvPr id="1" name=""/>
+        <p:cNvGrpSpPr/>
+        <p:nvPr/>
+      </p:nvGrpSpPr>
+      <p:grpSpPr>
+        <a:xfrm>
+          <a:off x="0" y="0"/>
+          <a:ext cx="0" cy="0"/>
+          <a:chOff x="0" y="0"/>
+          <a:chExt cx="0" cy="0"/>
+        </a:xfrm>
+      </p:grpSpPr>
+      <p:sp useBgFill="1">
+        <p:nvSpPr>
+          <p:cNvPr id="13" name="Rectangle 12">
+            <a:extLst>
+              <a:ext uri="{FF2B5EF4-FFF2-40B4-BE49-F238E27FC236}">
+                <a16:creationId xmlns:a16="http://schemas.microsoft.com/office/drawing/2014/main" id="{352BEC0E-22F8-46D0-9632-375DB541B06C}"/>
+              </a:ext>
+              <a:ext uri="{C183D7F6-B498-43B3-948B-1728B52AA6E4}">
+                <adec:decorative xmlns:adec="http://schemas.microsoft.com/office/drawing/2017/decorative" val="1"/>
+              </a:ext>
+            </a:extLst>
+          </p:cNvPr>
+          <p:cNvSpPr>
+            <a:spLocks noGrp="1" noRot="1" noChangeAspect="1" noMove="1" noResize="1" noEditPoints="1" noAdjustHandles="1" noChangeArrowheads="1" noChangeShapeType="1" noTextEdit="1"/>
+          </p:cNvSpPr>
+          <p:nvPr>
+            <p:extLst>
+              <p:ext uri="{386F3935-93C4-4BCD-93E2-E3B085C9AB24}">
+                <p16:designElem xmlns:p16="http://schemas.microsoft.com/office/powerpoint/2015/main" val="1"/>
+              </p:ext>
+            </p:extLst>
+          </p:nvPr>
+        </p:nvSpPr>
+        <p:spPr>
+          <a:xfrm>
+            <a:off x="0" y="0"/>
+            <a:ext cx="12188952" cy="6858000"/>
+          </a:xfrm>
+          <a:prstGeom prst="rect">
+            <a:avLst/>
+          </a:prstGeom>
+          <a:ln>
+            <a:noFill/>
+          </a:ln>
+        </p:spPr>
+        <p:style>
+          <a:lnRef idx="2">
+            <a:schemeClr val="accent1">
+              <a:shade val="50000"/>
+            </a:schemeClr>
+          </a:lnRef>
+          <a:fillRef idx="1">
+            <a:schemeClr val="accent1"/>
+          </a:fillRef>
+          <a:effectRef idx="0">
+            <a:schemeClr val="accent1"/>
+          </a:effectRef>
+          <a:fontRef idx="minor">
+            <a:schemeClr val="lt1"/>
+          </a:fontRef>
+        </p:style>
+        <p:txBody>
+          <a:bodyPr rtlCol="0" anchor="ctr"/>
+          <a:lstStyle/>
+          <a:p>
+            <a:pPr algn="ctr"/>
+            <a:endParaRPr lang="en-US"/>
+          </a:p>
+        </p:txBody>
+      </p:sp>
+      <p:sp>
+        <p:nvSpPr>
+          <p:cNvPr id="15" name="sketch line">
+            <a:extLst>
+              <a:ext uri="{FF2B5EF4-FFF2-40B4-BE49-F238E27FC236}">
+                <a16:creationId xmlns:a16="http://schemas.microsoft.com/office/drawing/2014/main" id="{3FCFB1DE-0B7E-48CC-BA90-B2AB0889F9D6}"/>
+              </a:ext>
+              <a:ext uri="{C183D7F6-B498-43B3-948B-1728B52AA6E4}">
+                <adec:decorative xmlns:adec="http://schemas.microsoft.com/office/drawing/2017/decorative" val="1"/>
+              </a:ext>
+            </a:extLst>
+          </p:cNvPr>
+          <p:cNvSpPr>
+            <a:spLocks noGrp="1" noRot="1" noChangeAspect="1" noMove="1" noResize="1" noEditPoints="1" noAdjustHandles="1" noChangeArrowheads="1" noChangeShapeType="1" noTextEdit="1"/>
+          </p:cNvSpPr>
+          <p:nvPr>
+            <p:extLst>
+              <p:ext uri="{386F3935-93C4-4BCD-93E2-E3B085C9AB24}">
+                <p16:designElem xmlns:p16="http://schemas.microsoft.com/office/powerpoint/2015/main" val="1"/>
+              </p:ext>
+            </p:extLst>
+          </p:nvPr>
+        </p:nvSpPr>
+        <p:spPr>
+          <a:xfrm>
+            <a:off x="758952" y="2395728"/>
+            <a:ext cx="4243589" cy="18288"/>
+          </a:xfrm>
+          <a:custGeom>
+            <a:avLst/>
+            <a:gdLst>
+              <a:gd name="csX0" fmla="*/ 0 w 4243589"/>
+              <a:gd name="csY0" fmla="*/ 0 h 18288"/>
+              <a:gd name="csX1" fmla="*/ 478919 w 4243589"/>
+              <a:gd name="csY1" fmla="*/ 0 h 18288"/>
+              <a:gd name="csX2" fmla="*/ 957839 w 4243589"/>
+              <a:gd name="csY2" fmla="*/ 0 h 18288"/>
+              <a:gd name="csX3" fmla="*/ 1521630 w 4243589"/>
+              <a:gd name="csY3" fmla="*/ 0 h 18288"/>
+              <a:gd name="csX4" fmla="*/ 2212729 w 4243589"/>
+              <a:gd name="csY4" fmla="*/ 0 h 18288"/>
+              <a:gd name="csX5" fmla="*/ 2734084 w 4243589"/>
+              <a:gd name="csY5" fmla="*/ 0 h 18288"/>
+              <a:gd name="csX6" fmla="*/ 3255439 w 4243589"/>
+              <a:gd name="csY6" fmla="*/ 0 h 18288"/>
+              <a:gd name="csX7" fmla="*/ 4243589 w 4243589"/>
+              <a:gd name="csY7" fmla="*/ 0 h 18288"/>
+              <a:gd name="csX8" fmla="*/ 4243589 w 4243589"/>
+              <a:gd name="csY8" fmla="*/ 18288 h 18288"/>
+              <a:gd name="csX9" fmla="*/ 3594926 w 4243589"/>
+              <a:gd name="csY9" fmla="*/ 18288 h 18288"/>
+              <a:gd name="csX10" fmla="*/ 3073571 w 4243589"/>
+              <a:gd name="csY10" fmla="*/ 18288 h 18288"/>
+              <a:gd name="csX11" fmla="*/ 2552216 w 4243589"/>
+              <a:gd name="csY11" fmla="*/ 18288 h 18288"/>
+              <a:gd name="csX12" fmla="*/ 1903553 w 4243589"/>
+              <a:gd name="csY12" fmla="*/ 18288 h 18288"/>
+              <a:gd name="csX13" fmla="*/ 1212454 w 4243589"/>
+              <a:gd name="csY13" fmla="*/ 18288 h 18288"/>
+              <a:gd name="csX14" fmla="*/ 733535 w 4243589"/>
+              <a:gd name="csY14" fmla="*/ 18288 h 18288"/>
+              <a:gd name="csX15" fmla="*/ 0 w 4243589"/>
+              <a:gd name="csY15" fmla="*/ 18288 h 18288"/>
+              <a:gd name="csX16" fmla="*/ 0 w 4243589"/>
+              <a:gd name="csY16" fmla="*/ 0 h 18288"/>
+            </a:gdLst>
+            <a:ahLst/>
+            <a:cxnLst>
+              <a:cxn ang="0">
+                <a:pos x="csX0" y="csY0"/>
+              </a:cxn>
+              <a:cxn ang="0">
+                <a:pos x="csX1" y="csY1"/>
+              </a:cxn>
+              <a:cxn ang="0">
+                <a:pos x="csX2" y="csY2"/>
+              </a:cxn>
+              <a:cxn ang="0">
+                <a:pos x="csX3" y="csY3"/>
+              </a:cxn>
+              <a:cxn ang="0">
+                <a:pos x="csX4" y="csY4"/>
+              </a:cxn>
+              <a:cxn ang="0">
+                <a:pos x="csX5" y="csY5"/>
+              </a:cxn>
+              <a:cxn ang="0">
+                <a:pos x="csX6" y="csY6"/>
+              </a:cxn>
+              <a:cxn ang="0">
+                <a:pos x="csX7" y="csY7"/>
+              </a:cxn>
+              <a:cxn ang="0">
+                <a:pos x="csX8" y="csY8"/>
+              </a:cxn>
+              <a:cxn ang="0">
+                <a:pos x="csX9" y="csY9"/>
+              </a:cxn>
+              <a:cxn ang="0">
+                <a:pos x="csX10" y="csY10"/>
+              </a:cxn>
+              <a:cxn ang="0">
+                <a:pos x="csX11" y="csY11"/>
+              </a:cxn>
+              <a:cxn ang="0">
+                <a:pos x="csX12" y="csY12"/>
+              </a:cxn>
+              <a:cxn ang="0">
+                <a:pos x="csX13" y="csY13"/>
+              </a:cxn>
+              <a:cxn ang="0">
+                <a:pos x="csX14" y="csY14"/>
+              </a:cxn>
+              <a:cxn ang="0">
+                <a:pos x="csX15" y="csY15"/>
+              </a:cxn>
+              <a:cxn ang="0">
+                <a:pos x="csX16" y="csY16"/>
+              </a:cxn>
+            </a:cxnLst>
+            <a:rect l="l" t="t" r="r" b="b"/>
+            <a:pathLst>
+              <a:path w="4243589" h="18288" fill="none" extrusionOk="0">
+                <a:moveTo>
+                  <a:pt x="0" y="0"/>
+                </a:moveTo>
+                <a:cubicBezTo>
+                  <a:pt x="213395" y="-21006"/>
+                  <a:pt x="307421" y="-18116"/>
+                  <a:pt x="478919" y="0"/>
+                </a:cubicBezTo>
+                <a:cubicBezTo>
+                  <a:pt x="650417" y="18116"/>
+                  <a:pt x="831092" y="-21237"/>
+                  <a:pt x="957839" y="0"/>
+                </a:cubicBezTo>
+                <a:cubicBezTo>
+                  <a:pt x="1084586" y="21237"/>
+                  <a:pt x="1301682" y="25124"/>
+                  <a:pt x="1521630" y="0"/>
+                </a:cubicBezTo>
+                <a:cubicBezTo>
+                  <a:pt x="1741578" y="-25124"/>
+                  <a:pt x="1970269" y="-29139"/>
+                  <a:pt x="2212729" y="0"/>
+                </a:cubicBezTo>
+                <a:cubicBezTo>
+                  <a:pt x="2455189" y="29139"/>
+                  <a:pt x="2558847" y="-4796"/>
+                  <a:pt x="2734084" y="0"/>
+                </a:cubicBezTo>
+                <a:cubicBezTo>
+                  <a:pt x="2909321" y="4796"/>
+                  <a:pt x="3097217" y="-13409"/>
+                  <a:pt x="3255439" y="0"/>
+                </a:cubicBezTo>
+                <a:cubicBezTo>
+                  <a:pt x="3413662" y="13409"/>
+                  <a:pt x="3979999" y="-10121"/>
+                  <a:pt x="4243589" y="0"/>
+                </a:cubicBezTo>
+                <a:cubicBezTo>
+                  <a:pt x="4244484" y="8974"/>
+                  <a:pt x="4243043" y="9359"/>
+                  <a:pt x="4243589" y="18288"/>
+                </a:cubicBezTo>
+                <a:cubicBezTo>
+                  <a:pt x="4058777" y="31246"/>
+                  <a:pt x="3910348" y="3158"/>
+                  <a:pt x="3594926" y="18288"/>
+                </a:cubicBezTo>
+                <a:cubicBezTo>
+                  <a:pt x="3279504" y="33418"/>
+                  <a:pt x="3319955" y="-3977"/>
+                  <a:pt x="3073571" y="18288"/>
+                </a:cubicBezTo>
+                <a:cubicBezTo>
+                  <a:pt x="2827187" y="40553"/>
+                  <a:pt x="2767387" y="1863"/>
+                  <a:pt x="2552216" y="18288"/>
+                </a:cubicBezTo>
+                <a:cubicBezTo>
+                  <a:pt x="2337046" y="34713"/>
+                  <a:pt x="2181871" y="19527"/>
+                  <a:pt x="1903553" y="18288"/>
+                </a:cubicBezTo>
+                <a:cubicBezTo>
+                  <a:pt x="1625235" y="17049"/>
+                  <a:pt x="1557672" y="24174"/>
+                  <a:pt x="1212454" y="18288"/>
+                </a:cubicBezTo>
+                <a:cubicBezTo>
+                  <a:pt x="867236" y="12402"/>
+                  <a:pt x="874382" y="15627"/>
+                  <a:pt x="733535" y="18288"/>
+                </a:cubicBezTo>
+                <a:cubicBezTo>
+                  <a:pt x="592688" y="20949"/>
+                  <a:pt x="183477" y="14753"/>
+                  <a:pt x="0" y="18288"/>
+                </a:cubicBezTo>
+                <a:cubicBezTo>
+                  <a:pt x="-229" y="14222"/>
+                  <a:pt x="509" y="5816"/>
+                  <a:pt x="0" y="0"/>
+                </a:cubicBezTo>
+                <a:close/>
+              </a:path>
+              <a:path w="4243589" h="18288" stroke="0" extrusionOk="0">
+                <a:moveTo>
+                  <a:pt x="0" y="0"/>
+                </a:moveTo>
+                <a:cubicBezTo>
+                  <a:pt x="143690" y="16630"/>
+                  <a:pt x="266667" y="14847"/>
+                  <a:pt x="521355" y="0"/>
+                </a:cubicBezTo>
+                <a:cubicBezTo>
+                  <a:pt x="776043" y="-14847"/>
+                  <a:pt x="814491" y="-17363"/>
+                  <a:pt x="1000275" y="0"/>
+                </a:cubicBezTo>
+                <a:cubicBezTo>
+                  <a:pt x="1186059" y="17363"/>
+                  <a:pt x="1352504" y="-23507"/>
+                  <a:pt x="1521630" y="0"/>
+                </a:cubicBezTo>
+                <a:cubicBezTo>
+                  <a:pt x="1690756" y="23507"/>
+                  <a:pt x="1889525" y="5871"/>
+                  <a:pt x="2127857" y="0"/>
+                </a:cubicBezTo>
+                <a:cubicBezTo>
+                  <a:pt x="2366189" y="-5871"/>
+                  <a:pt x="2620628" y="-27997"/>
+                  <a:pt x="2776520" y="0"/>
+                </a:cubicBezTo>
+                <a:cubicBezTo>
+                  <a:pt x="2932412" y="27997"/>
+                  <a:pt x="3131683" y="-25073"/>
+                  <a:pt x="3467618" y="0"/>
+                </a:cubicBezTo>
+                <a:cubicBezTo>
+                  <a:pt x="3803553" y="25073"/>
+                  <a:pt x="4017371" y="3071"/>
+                  <a:pt x="4243589" y="0"/>
+                </a:cubicBezTo>
+                <a:cubicBezTo>
+                  <a:pt x="4243134" y="6162"/>
+                  <a:pt x="4243492" y="11775"/>
+                  <a:pt x="4243589" y="18288"/>
+                </a:cubicBezTo>
+                <a:cubicBezTo>
+                  <a:pt x="4017834" y="-5779"/>
+                  <a:pt x="3834586" y="13376"/>
+                  <a:pt x="3594926" y="18288"/>
+                </a:cubicBezTo>
+                <a:cubicBezTo>
+                  <a:pt x="3355266" y="23200"/>
+                  <a:pt x="3204179" y="2869"/>
+                  <a:pt x="2903827" y="18288"/>
+                </a:cubicBezTo>
+                <a:cubicBezTo>
+                  <a:pt x="2603475" y="33707"/>
+                  <a:pt x="2526187" y="46187"/>
+                  <a:pt x="2212729" y="18288"/>
+                </a:cubicBezTo>
+                <a:cubicBezTo>
+                  <a:pt x="1899271" y="-9611"/>
+                  <a:pt x="1966289" y="29692"/>
+                  <a:pt x="1733809" y="18288"/>
+                </a:cubicBezTo>
+                <a:cubicBezTo>
+                  <a:pt x="1501329" y="6884"/>
+                  <a:pt x="1343612" y="12492"/>
+                  <a:pt x="1085146" y="18288"/>
+                </a:cubicBezTo>
+                <a:cubicBezTo>
+                  <a:pt x="826680" y="24084"/>
+                  <a:pt x="778184" y="35607"/>
+                  <a:pt x="521355" y="18288"/>
+                </a:cubicBezTo>
+                <a:cubicBezTo>
+                  <a:pt x="264526" y="969"/>
+                  <a:pt x="120277" y="4268"/>
+                  <a:pt x="0" y="18288"/>
+                </a:cubicBezTo>
+                <a:cubicBezTo>
+                  <a:pt x="766" y="10800"/>
+                  <a:pt x="-457" y="8180"/>
+                  <a:pt x="0" y="0"/>
+                </a:cubicBezTo>
+                <a:close/>
+              </a:path>
+            </a:pathLst>
+          </a:custGeom>
+          <a:solidFill>
+            <a:schemeClr val="accent2"/>
+          </a:solidFill>
+          <a:ln w="41275" cap="rnd">
+            <a:solidFill>
+              <a:schemeClr val="accent2"/>
+            </a:solidFill>
+            <a:round/>
+            <a:extLst>
+              <a:ext uri="{C807C97D-BFC1-408E-A445-0C87EB9F89A2}">
+                <ask:lineSketchStyleProps xmlns:ask="http://schemas.microsoft.com/office/drawing/2018/sketchyshapes" sd="2727557108">
+                  <a:prstGeom prst="rect">
+                    <a:avLst/>
+                  </a:prstGeom>
+                  <ask:type>
+                    <ask:lineSketchFreehand/>
+                  </ask:type>
+                </ask:lineSketchStyleProps>
+              </a:ext>
+            </a:extLst>
+          </a:ln>
+        </p:spPr>
+        <p:style>
+          <a:lnRef idx="2">
+            <a:schemeClr val="accent1">
+              <a:shade val="50000"/>
+            </a:schemeClr>
+          </a:lnRef>
+          <a:fillRef idx="1">
+            <a:schemeClr val="accent1"/>
+          </a:fillRef>
+          <a:effectRef idx="0">
+            <a:schemeClr val="accent1"/>
+          </a:effectRef>
+          <a:fontRef idx="minor">
+            <a:schemeClr val="lt1"/>
+          </a:fontRef>
+        </p:style>
+        <p:txBody>
+          <a:bodyPr rtlCol="0" anchor="ctr"/>
+          <a:lstStyle/>
+          <a:p>
+            <a:pPr algn="ctr"/>
+            <a:endParaRPr lang="en-US"/>
+          </a:p>
+        </p:txBody>
+      </p:sp>
+      <p:sp>
+        <p:nvSpPr>
+          <p:cNvPr id="3" name="TextBox 2">
+            <a:extLst>
+              <a:ext uri="{FF2B5EF4-FFF2-40B4-BE49-F238E27FC236}">
+                <a16:creationId xmlns:a16="http://schemas.microsoft.com/office/drawing/2014/main" id="{21B00C88-12EA-7FB6-38E3-CEFFF81F0A14}"/>
+              </a:ext>
+            </a:extLst>
+          </p:cNvPr>
+          <p:cNvSpPr txBox="1"/>
+          <p:nvPr/>
+        </p:nvSpPr>
+        <p:spPr>
+          <a:xfrm>
+            <a:off x="640080" y="2706624"/>
+            <a:ext cx="6894576" cy="3483864"/>
+          </a:xfrm>
+          <a:prstGeom prst="rect">
+            <a:avLst/>
+          </a:prstGeom>
+        </p:spPr>
+        <p:txBody>
+          <a:bodyPr vert="horz" lIns="91440" tIns="45720" rIns="91440" bIns="45720" rtlCol="0">
+            <a:normAutofit/>
+          </a:bodyPr>
+          <a:lstStyle/>
+          <a:p>
+            <a:pPr indent="-228600">
+              <a:lnSpc>
+                <a:spcPct val="90000"/>
+              </a:lnSpc>
+              <a:spcAft>
+                <a:spcPts val="600"/>
+              </a:spcAft>
+              <a:buFont typeface="Arial" panose="020B0604020202020204" pitchFamily="34" charset="0"/>
+              <a:buChar char="•"/>
+            </a:pPr>
+            <a:r>
+              <a:rPr lang="en-US" sz="2200"/>
+              <a:t>Examples in ECE:</a:t>
+            </a:r>
+          </a:p>
+          <a:p>
+            <a:pPr indent="-228600">
+              <a:lnSpc>
+                <a:spcPct val="90000"/>
+              </a:lnSpc>
+              <a:spcAft>
+                <a:spcPts val="600"/>
+              </a:spcAft>
+              <a:buFont typeface="Arial" panose="020B0604020202020204" pitchFamily="34" charset="0"/>
+              <a:buChar char="•"/>
+            </a:pPr>
+            <a:r>
+              <a:rPr lang="en-US" sz="2200"/>
+              <a:t>Folder structure in embedded systems </a:t>
+            </a:r>
+          </a:p>
+          <a:p>
+            <a:pPr indent="-228600">
+              <a:lnSpc>
+                <a:spcPct val="90000"/>
+              </a:lnSpc>
+              <a:spcAft>
+                <a:spcPts val="600"/>
+              </a:spcAft>
+              <a:buFont typeface="Arial" panose="020B0604020202020204" pitchFamily="34" charset="0"/>
+              <a:buChar char="•"/>
+            </a:pPr>
+            <a:r>
+              <a:rPr lang="en-US" sz="2200"/>
+              <a:t>Decision logic circuits </a:t>
+            </a:r>
+          </a:p>
+          <a:p>
+            <a:pPr indent="-228600">
+              <a:lnSpc>
+                <a:spcPct val="90000"/>
+              </a:lnSpc>
+              <a:spcAft>
+                <a:spcPts val="600"/>
+              </a:spcAft>
+              <a:buFont typeface="Arial" panose="020B0604020202020204" pitchFamily="34" charset="0"/>
+              <a:buChar char="•"/>
+            </a:pPr>
+            <a:r>
+              <a:rPr lang="en-US" sz="2200"/>
+              <a:t>Packet routing paths </a:t>
+            </a:r>
+          </a:p>
+          <a:p>
+            <a:pPr indent="-228600">
+              <a:lnSpc>
+                <a:spcPct val="90000"/>
+              </a:lnSpc>
+              <a:spcAft>
+                <a:spcPts val="600"/>
+              </a:spcAft>
+              <a:buFont typeface="Arial" panose="020B0604020202020204" pitchFamily="34" charset="0"/>
+              <a:buChar char="•"/>
+            </a:pPr>
+            <a:r>
+              <a:rPr lang="en-US" sz="2200"/>
+              <a:t>Expression trees in DSP </a:t>
+            </a:r>
+          </a:p>
+          <a:p>
+            <a:pPr indent="-228600">
+              <a:lnSpc>
+                <a:spcPct val="90000"/>
+              </a:lnSpc>
+              <a:spcAft>
+                <a:spcPts val="600"/>
+              </a:spcAft>
+              <a:buFont typeface="Arial" panose="020B0604020202020204" pitchFamily="34" charset="0"/>
+              <a:buChar char="•"/>
+            </a:pPr>
+            <a:r>
+              <a:rPr lang="en-US" sz="2200"/>
+              <a:t>Call hierarchy in firmware</a:t>
+            </a:r>
+          </a:p>
+        </p:txBody>
+      </p:sp>
+      <p:pic>
+        <p:nvPicPr>
+          <p:cNvPr id="5" name="Picture 4">
+            <a:extLst>
+              <a:ext uri="{FF2B5EF4-FFF2-40B4-BE49-F238E27FC236}">
+                <a16:creationId xmlns:a16="http://schemas.microsoft.com/office/drawing/2014/main" id="{9C9745EB-9A34-4187-D79E-FC188EFDF17F}"/>
+              </a:ext>
+            </a:extLst>
+          </p:cNvPr>
+          <p:cNvPicPr>
+            <a:picLocks noChangeAspect="1"/>
+          </p:cNvPicPr>
+          <p:nvPr/>
+        </p:nvPicPr>
+        <p:blipFill>
+          <a:blip r:embed="rId2"/>
+          <a:stretch>
+            <a:fillRect/>
+          </a:stretch>
+        </p:blipFill>
+        <p:spPr>
+          <a:xfrm>
+            <a:off x="8378276" y="329183"/>
+            <a:ext cx="2985343" cy="3429969"/>
+          </a:xfrm>
+          <a:prstGeom prst="rect">
+            <a:avLst/>
+          </a:prstGeom>
+        </p:spPr>
+      </p:pic>
+      <p:pic>
+        <p:nvPicPr>
+          <p:cNvPr id="8" name="Picture 7">
+            <a:extLst>
+              <a:ext uri="{FF2B5EF4-FFF2-40B4-BE49-F238E27FC236}">
+                <a16:creationId xmlns:a16="http://schemas.microsoft.com/office/drawing/2014/main" id="{63112B3D-08E0-1299-3CD4-7A5B34D8998B}"/>
+              </a:ext>
+            </a:extLst>
+          </p:cNvPr>
+          <p:cNvPicPr>
+            <a:picLocks noChangeAspect="1"/>
+          </p:cNvPicPr>
+          <p:nvPr/>
+        </p:nvPicPr>
+        <p:blipFill>
+          <a:blip r:embed="rId3"/>
+          <a:stretch>
+            <a:fillRect/>
+          </a:stretch>
+        </p:blipFill>
+        <p:spPr>
+          <a:xfrm>
+            <a:off x="8216199" y="4079193"/>
+            <a:ext cx="3291209" cy="2176272"/>
+          </a:xfrm>
+          <a:prstGeom prst="rect">
+            <a:avLst/>
+          </a:prstGeom>
+        </p:spPr>
+      </p:pic>
+    </p:spTree>
+    <p:extLst>
+      <p:ext uri="{BB962C8B-B14F-4D97-AF65-F5344CB8AC3E}">
+        <p14:creationId xmlns:p14="http://schemas.microsoft.com/office/powerpoint/2010/main" val="2484219042"/>
+      </p:ext>
+    </p:extLst>
+  </p:cSld>
+  <p:clrMapOvr>
+    <a:masterClrMapping/>
+  </p:clrMapOvr>
+</p:sld>
+</file>
+
+<file path=ppt/slides/slide14.xml><?xml version="1.0" encoding="utf-8"?>
+<p:sld xmlns:a="http://schemas.openxmlformats.org/drawingml/2006/main" xmlns:r="http://schemas.openxmlformats.org/officeDocument/2006/relationships" xmlns:p="http://schemas.openxmlformats.org/presentationml/2006/main">
+  <p:cSld>
+    <p:bg>
+      <p:bgPr>
+        <a:solidFill>
+          <a:schemeClr val="bg1"/>
+        </a:solidFill>
+        <a:effectLst/>
+      </p:bgPr>
+    </p:bg>
+    <p:spTree>
+      <p:nvGrpSpPr>
+        <p:cNvPr id="1" name=""/>
+        <p:cNvGrpSpPr/>
+        <p:nvPr/>
+      </p:nvGrpSpPr>
+      <p:grpSpPr>
+        <a:xfrm>
+          <a:off x="0" y="0"/>
+          <a:ext cx="0" cy="0"/>
+          <a:chOff x="0" y="0"/>
+          <a:chExt cx="0" cy="0"/>
+        </a:xfrm>
+      </p:grpSpPr>
+      <p:pic>
+        <p:nvPicPr>
+          <p:cNvPr id="3" name="Picture 2">
+            <a:extLst>
+              <a:ext uri="{FF2B5EF4-FFF2-40B4-BE49-F238E27FC236}">
+                <a16:creationId xmlns:a16="http://schemas.microsoft.com/office/drawing/2014/main" id="{8F54FBB6-D149-C38B-E016-5C53BAC3A72C}"/>
+              </a:ext>
+            </a:extLst>
+          </p:cNvPr>
+          <p:cNvPicPr>
+            <a:picLocks noChangeAspect="1"/>
+          </p:cNvPicPr>
+          <p:nvPr/>
+        </p:nvPicPr>
+        <p:blipFill>
+          <a:blip r:embed="rId2"/>
+          <a:stretch>
+            <a:fillRect/>
+          </a:stretch>
+        </p:blipFill>
+        <p:spPr>
+          <a:xfrm>
+            <a:off x="643467" y="944301"/>
+            <a:ext cx="10905066" cy="4969396"/>
+          </a:xfrm>
+          <a:prstGeom prst="rect">
+            <a:avLst/>
+          </a:prstGeom>
+        </p:spPr>
+      </p:pic>
+    </p:spTree>
+    <p:extLst>
+      <p:ext uri="{BB962C8B-B14F-4D97-AF65-F5344CB8AC3E}">
+        <p14:creationId xmlns:p14="http://schemas.microsoft.com/office/powerpoint/2010/main" val="830403665"/>
+      </p:ext>
+    </p:extLst>
+  </p:cSld>
+  <p:clrMapOvr>
+    <a:masterClrMapping/>
+  </p:clrMapOvr>
+</p:sld>
+</file>
+
+<file path=ppt/slides/slide15.xml><?xml version="1.0" encoding="utf-8"?>
+<p:sld xmlns:a="http://schemas.openxmlformats.org/drawingml/2006/main" xmlns:r="http://schemas.openxmlformats.org/officeDocument/2006/relationships" xmlns:p="http://schemas.openxmlformats.org/presentationml/2006/main">
+  <p:cSld>
+    <p:bg>
+      <p:bgPr>
+        <a:solidFill>
+          <a:schemeClr val="bg1"/>
+        </a:solidFill>
+        <a:effectLst/>
+      </p:bgPr>
+    </p:bg>
+    <p:spTree>
+      <p:nvGrpSpPr>
+        <p:cNvPr id="1" name=""/>
+        <p:cNvGrpSpPr/>
+        <p:nvPr/>
+      </p:nvGrpSpPr>
+      <p:grpSpPr>
+        <a:xfrm>
+          <a:off x="0" y="0"/>
+          <a:ext cx="0" cy="0"/>
+          <a:chOff x="0" y="0"/>
+          <a:chExt cx="0" cy="0"/>
+        </a:xfrm>
+      </p:grpSpPr>
+      <p:pic>
+        <p:nvPicPr>
+          <p:cNvPr id="4" name="Picture 3">
+            <a:extLst>
+              <a:ext uri="{FF2B5EF4-FFF2-40B4-BE49-F238E27FC236}">
+                <a16:creationId xmlns:a16="http://schemas.microsoft.com/office/drawing/2014/main" id="{F17A881D-F8AE-16FD-FF6D-4ABD7FA21856}"/>
+              </a:ext>
+            </a:extLst>
+          </p:cNvPr>
+          <p:cNvPicPr>
+            <a:picLocks noChangeAspect="1"/>
+          </p:cNvPicPr>
+          <p:nvPr/>
+        </p:nvPicPr>
+        <p:blipFill>
+          <a:blip r:embed="rId2"/>
+          <a:stretch>
+            <a:fillRect/>
+          </a:stretch>
+        </p:blipFill>
+        <p:spPr>
+          <a:xfrm>
+            <a:off x="864854" y="643467"/>
+            <a:ext cx="4848891" cy="5571066"/>
+          </a:xfrm>
+          <a:prstGeom prst="rect">
+            <a:avLst/>
+          </a:prstGeom>
+        </p:spPr>
+      </p:pic>
+      <p:pic>
+        <p:nvPicPr>
+          <p:cNvPr id="3" name="Picture 2">
+            <a:extLst>
+              <a:ext uri="{FF2B5EF4-FFF2-40B4-BE49-F238E27FC236}">
+                <a16:creationId xmlns:a16="http://schemas.microsoft.com/office/drawing/2014/main" id="{78F20F46-C17F-D362-AC90-B7E175EFAB4B}"/>
+              </a:ext>
+            </a:extLst>
+          </p:cNvPr>
+          <p:cNvPicPr>
+            <a:picLocks noChangeAspect="1"/>
+          </p:cNvPicPr>
+          <p:nvPr/>
+        </p:nvPicPr>
+        <p:blipFill>
+          <a:blip r:embed="rId3"/>
+          <a:stretch>
+            <a:fillRect/>
+          </a:stretch>
+        </p:blipFill>
+        <p:spPr>
+          <a:xfrm>
+            <a:off x="6256865" y="2450041"/>
+            <a:ext cx="5291667" cy="1957917"/>
+          </a:xfrm>
+          <a:prstGeom prst="rect">
+            <a:avLst/>
+          </a:prstGeom>
+        </p:spPr>
+      </p:pic>
+    </p:spTree>
+    <p:extLst>
+      <p:ext uri="{BB962C8B-B14F-4D97-AF65-F5344CB8AC3E}">
+        <p14:creationId xmlns:p14="http://schemas.microsoft.com/office/powerpoint/2010/main" val="1637942935"/>
+      </p:ext>
+    </p:extLst>
+  </p:cSld>
+  <p:clrMapOvr>
+    <a:masterClrMapping/>
+  </p:clrMapOvr>
+</p:sld>
+</file>
+
+<file path=ppt/slides/slide16.xml><?xml version="1.0" encoding="utf-8"?>
+<p:sld xmlns:a="http://schemas.openxmlformats.org/drawingml/2006/main" xmlns:r="http://schemas.openxmlformats.org/officeDocument/2006/relationships" xmlns:p="http://schemas.openxmlformats.org/presentationml/2006/main">
+  <p:cSld>
+    <p:bg>
+      <p:bgPr>
+        <a:solidFill>
+          <a:schemeClr val="bg1"/>
+        </a:solidFill>
+        <a:effectLst/>
+      </p:bgPr>
+    </p:bg>
+    <p:spTree>
+      <p:nvGrpSpPr>
+        <p:cNvPr id="1" name=""/>
+        <p:cNvGrpSpPr/>
+        <p:nvPr/>
+      </p:nvGrpSpPr>
+      <p:grpSpPr>
+        <a:xfrm>
+          <a:off x="0" y="0"/>
+          <a:ext cx="0" cy="0"/>
+          <a:chOff x="0" y="0"/>
+          <a:chExt cx="0" cy="0"/>
+        </a:xfrm>
+      </p:grpSpPr>
+      <p:sp useBgFill="1">
+        <p:nvSpPr>
+          <p:cNvPr id="13" name="Rectangle 12">
+            <a:extLst>
+              <a:ext uri="{FF2B5EF4-FFF2-40B4-BE49-F238E27FC236}">
+                <a16:creationId xmlns:a16="http://schemas.microsoft.com/office/drawing/2014/main" id="{53F29798-D584-4792-9B62-3F5F5C36D619}"/>
+              </a:ext>
+              <a:ext uri="{C183D7F6-B498-43B3-948B-1728B52AA6E4}">
+                <adec:decorative xmlns:adec="http://schemas.microsoft.com/office/drawing/2017/decorative" val="1"/>
+              </a:ext>
+            </a:extLst>
+          </p:cNvPr>
+          <p:cNvSpPr>
+            <a:spLocks noGrp="1" noRot="1" noChangeAspect="1" noMove="1" noResize="1" noEditPoints="1" noAdjustHandles="1" noChangeArrowheads="1" noChangeShapeType="1" noTextEdit="1"/>
+          </p:cNvSpPr>
+          <p:nvPr>
+            <p:extLst>
+              <p:ext uri="{386F3935-93C4-4BCD-93E2-E3B085C9AB24}">
+                <p16:designElem xmlns:p16="http://schemas.microsoft.com/office/powerpoint/2015/main" val="1"/>
+              </p:ext>
+            </p:extLst>
+          </p:nvPr>
+        </p:nvSpPr>
+        <p:spPr>
+          <a:xfrm>
+            <a:off x="0" y="0"/>
+            <a:ext cx="12188952" cy="6858000"/>
+          </a:xfrm>
+          <a:prstGeom prst="rect">
+            <a:avLst/>
+          </a:prstGeom>
+          <a:ln>
+            <a:noFill/>
+          </a:ln>
+        </p:spPr>
+        <p:style>
+          <a:lnRef idx="2">
+            <a:schemeClr val="accent1">
+              <a:shade val="50000"/>
+            </a:schemeClr>
+          </a:lnRef>
+          <a:fillRef idx="1">
+            <a:schemeClr val="accent1"/>
+          </a:fillRef>
+          <a:effectRef idx="0">
+            <a:schemeClr val="accent1"/>
+          </a:effectRef>
+          <a:fontRef idx="minor">
+            <a:schemeClr val="lt1"/>
+          </a:fontRef>
+        </p:style>
+        <p:txBody>
+          <a:bodyPr rtlCol="0" anchor="ctr"/>
+          <a:lstStyle/>
+          <a:p>
+            <a:pPr algn="ctr"/>
+            <a:endParaRPr lang="en-US"/>
+          </a:p>
+        </p:txBody>
+      </p:sp>
+      <p:sp>
+        <p:nvSpPr>
+          <p:cNvPr id="4" name="Title 3">
+            <a:extLst>
+              <a:ext uri="{FF2B5EF4-FFF2-40B4-BE49-F238E27FC236}">
+                <a16:creationId xmlns:a16="http://schemas.microsoft.com/office/drawing/2014/main" id="{B97A0DC5-8EB9-7EA7-0676-4B9916DA6603}"/>
+              </a:ext>
+            </a:extLst>
+          </p:cNvPr>
+          <p:cNvSpPr>
+            <a:spLocks noGrp="1"/>
+          </p:cNvSpPr>
+          <p:nvPr>
+            <p:ph type="title"/>
+          </p:nvPr>
+        </p:nvSpPr>
+        <p:spPr>
+          <a:xfrm>
+            <a:off x="838200" y="184805"/>
+            <a:ext cx="10515600" cy="1505883"/>
+          </a:xfrm>
+        </p:spPr>
+        <p:txBody>
+          <a:bodyPr anchor="ctr">
+            <a:normAutofit/>
+          </a:bodyPr>
+          <a:lstStyle/>
+          <a:p>
+            <a:r>
+              <a:rPr lang="en-IN" sz="5200"/>
+              <a:t>Recursion Basics </a:t>
+            </a:r>
+          </a:p>
+        </p:txBody>
+      </p:sp>
+      <p:pic>
+        <p:nvPicPr>
+          <p:cNvPr id="8" name="Picture 7">
+            <a:extLst>
+              <a:ext uri="{FF2B5EF4-FFF2-40B4-BE49-F238E27FC236}">
+                <a16:creationId xmlns:a16="http://schemas.microsoft.com/office/drawing/2014/main" id="{D427BBC3-BD94-96AF-C258-83DE8A1C0790}"/>
+              </a:ext>
+            </a:extLst>
+          </p:cNvPr>
+          <p:cNvPicPr>
+            <a:picLocks noChangeAspect="1"/>
+          </p:cNvPicPr>
+          <p:nvPr/>
+        </p:nvPicPr>
+        <p:blipFill>
+          <a:blip r:embed="rId2"/>
+          <a:stretch>
+            <a:fillRect/>
+          </a:stretch>
+        </p:blipFill>
+        <p:spPr>
+          <a:xfrm>
+            <a:off x="2513039" y="1845426"/>
+            <a:ext cx="7162868" cy="4450303"/>
+          </a:xfrm>
+          <a:prstGeom prst="rect">
+            <a:avLst/>
+          </a:prstGeom>
+        </p:spPr>
+      </p:pic>
+    </p:spTree>
+    <p:extLst>
+      <p:ext uri="{BB962C8B-B14F-4D97-AF65-F5344CB8AC3E}">
+        <p14:creationId xmlns:p14="http://schemas.microsoft.com/office/powerpoint/2010/main" val="4072936617"/>
+      </p:ext>
+    </p:extLst>
+  </p:cSld>
+  <p:clrMapOvr>
+    <a:masterClrMapping/>
+  </p:clrMapOvr>
+</p:sld>
+</file>
+
+<file path=ppt/slides/slide17.xml><?xml version="1.0" encoding="utf-8"?>
+<p:sld xmlns:a="http://schemas.openxmlformats.org/drawingml/2006/main" xmlns:r="http://schemas.openxmlformats.org/officeDocument/2006/relationships" xmlns:p="http://schemas.openxmlformats.org/presentationml/2006/main">
+  <p:cSld>
+    <p:bg>
+      <p:bgPr>
+        <a:solidFill>
+          <a:schemeClr val="bg1"/>
+        </a:solidFill>
+        <a:effectLst/>
+      </p:bgPr>
+    </p:bg>
+    <p:spTree>
+      <p:nvGrpSpPr>
+        <p:cNvPr id="1" name=""/>
+        <p:cNvGrpSpPr/>
+        <p:nvPr/>
+      </p:nvGrpSpPr>
+      <p:grpSpPr>
+        <a:xfrm>
+          <a:off x="0" y="0"/>
+          <a:ext cx="0" cy="0"/>
+          <a:chOff x="0" y="0"/>
+          <a:chExt cx="0" cy="0"/>
+        </a:xfrm>
+      </p:grpSpPr>
+      <p:sp useBgFill="1">
+        <p:nvSpPr>
+          <p:cNvPr id="10" name="Rectangle 9">
+            <a:extLst>
+              <a:ext uri="{FF2B5EF4-FFF2-40B4-BE49-F238E27FC236}">
+                <a16:creationId xmlns:a16="http://schemas.microsoft.com/office/drawing/2014/main" id="{53F29798-D584-4792-9B62-3F5F5C36D619}"/>
+              </a:ext>
+              <a:ext uri="{C183D7F6-B498-43B3-948B-1728B52AA6E4}">
+                <adec:decorative xmlns:adec="http://schemas.microsoft.com/office/drawing/2017/decorative" val="1"/>
+              </a:ext>
+            </a:extLst>
+          </p:cNvPr>
+          <p:cNvSpPr>
+            <a:spLocks noGrp="1" noRot="1" noChangeAspect="1" noMove="1" noResize="1" noEditPoints="1" noAdjustHandles="1" noChangeArrowheads="1" noChangeShapeType="1" noTextEdit="1"/>
+          </p:cNvSpPr>
+          <p:nvPr>
+            <p:extLst>
+              <p:ext uri="{386F3935-93C4-4BCD-93E2-E3B085C9AB24}">
+                <p16:designElem xmlns:p16="http://schemas.microsoft.com/office/powerpoint/2015/main" val="1"/>
+              </p:ext>
+            </p:extLst>
+          </p:nvPr>
+        </p:nvSpPr>
+        <p:spPr>
+          <a:xfrm>
+            <a:off x="0" y="0"/>
+            <a:ext cx="12188952" cy="6858000"/>
+          </a:xfrm>
+          <a:prstGeom prst="rect">
+            <a:avLst/>
+          </a:prstGeom>
+          <a:ln>
+            <a:noFill/>
+          </a:ln>
+        </p:spPr>
+        <p:style>
+          <a:lnRef idx="2">
+            <a:schemeClr val="accent1">
+              <a:shade val="50000"/>
+            </a:schemeClr>
+          </a:lnRef>
+          <a:fillRef idx="1">
+            <a:schemeClr val="accent1"/>
+          </a:fillRef>
+          <a:effectRef idx="0">
+            <a:schemeClr val="accent1"/>
+          </a:effectRef>
+          <a:fontRef idx="minor">
+            <a:schemeClr val="lt1"/>
+          </a:fontRef>
+        </p:style>
+        <p:txBody>
+          <a:bodyPr rtlCol="0" anchor="ctr"/>
+          <a:lstStyle/>
+          <a:p>
+            <a:pPr algn="ctr"/>
+            <a:endParaRPr lang="en-US"/>
+          </a:p>
+        </p:txBody>
+      </p:sp>
+      <p:sp>
+        <p:nvSpPr>
+          <p:cNvPr id="3" name="Title 2">
+            <a:extLst>
+              <a:ext uri="{FF2B5EF4-FFF2-40B4-BE49-F238E27FC236}">
+                <a16:creationId xmlns:a16="http://schemas.microsoft.com/office/drawing/2014/main" id="{29ED5A20-C167-1F5D-E541-6F4409AE2CAD}"/>
+              </a:ext>
+            </a:extLst>
+          </p:cNvPr>
+          <p:cNvSpPr>
+            <a:spLocks noGrp="1"/>
+          </p:cNvSpPr>
+          <p:nvPr>
+            <p:ph type="title"/>
+          </p:nvPr>
+        </p:nvSpPr>
+        <p:spPr>
+          <a:xfrm>
+            <a:off x="838200" y="184805"/>
+            <a:ext cx="10515600" cy="1505883"/>
+          </a:xfrm>
+        </p:spPr>
+        <p:txBody>
+          <a:bodyPr anchor="ctr">
+            <a:normAutofit/>
+          </a:bodyPr>
+          <a:lstStyle/>
+          <a:p>
+            <a:r>
+              <a:rPr lang="en-IN" sz="5200" dirty="0"/>
+              <a:t>DFS Traversals (Core Skill) -</a:t>
+            </a:r>
+            <a:r>
+              <a:rPr lang="en-IN" sz="5400" dirty="0">
+                <a:solidFill>
+                  <a:srgbClr val="FF0000"/>
+                </a:solidFill>
+              </a:rPr>
+              <a:t>Preorder</a:t>
+            </a:r>
+            <a:endParaRPr lang="en-IN" sz="5200" dirty="0">
+              <a:solidFill>
+                <a:srgbClr val="FF0000"/>
+              </a:solidFill>
+            </a:endParaRPr>
+          </a:p>
+        </p:txBody>
+      </p:sp>
+      <p:pic>
+        <p:nvPicPr>
+          <p:cNvPr id="5" name="Picture 4">
+            <a:extLst>
+              <a:ext uri="{FF2B5EF4-FFF2-40B4-BE49-F238E27FC236}">
+                <a16:creationId xmlns:a16="http://schemas.microsoft.com/office/drawing/2014/main" id="{A40FFD0A-ACEC-D7AC-3A22-64B183EF331C}"/>
+              </a:ext>
+            </a:extLst>
+          </p:cNvPr>
+          <p:cNvPicPr>
+            <a:picLocks noChangeAspect="1"/>
+          </p:cNvPicPr>
+          <p:nvPr/>
+        </p:nvPicPr>
+        <p:blipFill>
+          <a:blip r:embed="rId2"/>
+          <a:stretch>
+            <a:fillRect/>
+          </a:stretch>
+        </p:blipFill>
+        <p:spPr>
+          <a:xfrm>
+            <a:off x="1051491" y="1845426"/>
+            <a:ext cx="10085965" cy="4450303"/>
+          </a:xfrm>
+          <a:prstGeom prst="rect">
+            <a:avLst/>
+          </a:prstGeom>
+        </p:spPr>
+      </p:pic>
+      <p:sp>
+        <p:nvSpPr>
+          <p:cNvPr id="7" name="TextBox 6">
+            <a:extLst>
+              <a:ext uri="{FF2B5EF4-FFF2-40B4-BE49-F238E27FC236}">
+                <a16:creationId xmlns:a16="http://schemas.microsoft.com/office/drawing/2014/main" id="{C393A3E4-7D4F-1A7B-F5F4-04C44E16EE4D}"/>
+              </a:ext>
+            </a:extLst>
+          </p:cNvPr>
+          <p:cNvSpPr txBox="1"/>
+          <p:nvPr/>
+        </p:nvSpPr>
+        <p:spPr>
+          <a:xfrm>
+            <a:off x="8770374" y="1321356"/>
+            <a:ext cx="2153265" cy="369332"/>
+          </a:xfrm>
+          <a:prstGeom prst="rect">
+            <a:avLst/>
+          </a:prstGeom>
+        </p:spPr>
+        <p:style>
+          <a:lnRef idx="2">
+            <a:schemeClr val="accent3">
+              <a:shade val="15000"/>
+            </a:schemeClr>
+          </a:lnRef>
+          <a:fillRef idx="1">
+            <a:schemeClr val="accent3"/>
+          </a:fillRef>
+          <a:effectRef idx="0">
+            <a:schemeClr val="accent3"/>
+          </a:effectRef>
+          <a:fontRef idx="minor">
+            <a:schemeClr val="lt1"/>
+          </a:fontRef>
+        </p:style>
+        <p:txBody>
+          <a:bodyPr wrap="square">
+            <a:spAutoFit/>
+          </a:bodyPr>
+          <a:lstStyle/>
+          <a:p>
+            <a:r>
+              <a:rPr lang="en-IN" b="1" dirty="0"/>
+              <a:t>Root → Left → Right</a:t>
+            </a:r>
+          </a:p>
+        </p:txBody>
+      </p:sp>
+    </p:spTree>
+    <p:extLst>
+      <p:ext uri="{BB962C8B-B14F-4D97-AF65-F5344CB8AC3E}">
+        <p14:creationId xmlns:p14="http://schemas.microsoft.com/office/powerpoint/2010/main" val="289083492"/>
+      </p:ext>
+    </p:extLst>
+  </p:cSld>
+  <p:clrMapOvr>
+    <a:masterClrMapping/>
+  </p:clrMapOvr>
+</p:sld>
+</file>
+
+<file path=ppt/slides/slide18.xml><?xml version="1.0" encoding="utf-8"?>
+<p:sld xmlns:a="http://schemas.openxmlformats.org/drawingml/2006/main" xmlns:r="http://schemas.openxmlformats.org/officeDocument/2006/relationships" xmlns:p="http://schemas.openxmlformats.org/presentationml/2006/main">
+  <p:cSld>
+    <p:bg>
+      <p:bgPr>
+        <a:solidFill>
+          <a:schemeClr val="bg1"/>
+        </a:solidFill>
+        <a:effectLst/>
+      </p:bgPr>
+    </p:bg>
+    <p:spTree>
+      <p:nvGrpSpPr>
+        <p:cNvPr id="1" name="">
+          <a:extLst>
+            <a:ext uri="{FF2B5EF4-FFF2-40B4-BE49-F238E27FC236}">
+              <a16:creationId xmlns:a16="http://schemas.microsoft.com/office/drawing/2014/main" id="{758025D4-8323-282A-60CB-A1E8BDE9FDB9}"/>
+            </a:ext>
+          </a:extLst>
+        </p:cNvPr>
+        <p:cNvGrpSpPr/>
+        <p:nvPr/>
+      </p:nvGrpSpPr>
+      <p:grpSpPr>
+        <a:xfrm>
+          <a:off x="0" y="0"/>
+          <a:ext cx="0" cy="0"/>
+          <a:chOff x="0" y="0"/>
+          <a:chExt cx="0" cy="0"/>
+        </a:xfrm>
+      </p:grpSpPr>
+      <p:sp useBgFill="1">
+        <p:nvSpPr>
+          <p:cNvPr id="10" name="Rectangle 9">
+            <a:extLst>
+              <a:ext uri="{FF2B5EF4-FFF2-40B4-BE49-F238E27FC236}">
+                <a16:creationId xmlns:a16="http://schemas.microsoft.com/office/drawing/2014/main" id="{02E68D37-AA47-F805-5965-7392778AD089}"/>
+              </a:ext>
+              <a:ext uri="{C183D7F6-B498-43B3-948B-1728B52AA6E4}">
+                <adec:decorative xmlns:adec="http://schemas.microsoft.com/office/drawing/2017/decorative" val="1"/>
+              </a:ext>
+            </a:extLst>
+          </p:cNvPr>
+          <p:cNvSpPr>
+            <a:spLocks noGrp="1" noRot="1" noChangeAspect="1" noMove="1" noResize="1" noEditPoints="1" noAdjustHandles="1" noChangeArrowheads="1" noChangeShapeType="1" noTextEdit="1"/>
+          </p:cNvSpPr>
+          <p:nvPr>
+            <p:extLst>
+              <p:ext uri="{386F3935-93C4-4BCD-93E2-E3B085C9AB24}">
+                <p16:designElem xmlns:p16="http://schemas.microsoft.com/office/powerpoint/2015/main" val="1"/>
+              </p:ext>
+            </p:extLst>
+          </p:nvPr>
+        </p:nvSpPr>
+        <p:spPr>
+          <a:xfrm>
+            <a:off x="0" y="0"/>
+            <a:ext cx="12188952" cy="6858000"/>
+          </a:xfrm>
+          <a:prstGeom prst="rect">
+            <a:avLst/>
+          </a:prstGeom>
+          <a:ln>
+            <a:noFill/>
+          </a:ln>
+        </p:spPr>
+        <p:style>
+          <a:lnRef idx="2">
+            <a:schemeClr val="accent1">
+              <a:shade val="50000"/>
+            </a:schemeClr>
+          </a:lnRef>
+          <a:fillRef idx="1">
+            <a:schemeClr val="accent1"/>
+          </a:fillRef>
+          <a:effectRef idx="0">
+            <a:schemeClr val="accent1"/>
+          </a:effectRef>
+          <a:fontRef idx="minor">
+            <a:schemeClr val="lt1"/>
+          </a:fontRef>
+        </p:style>
+        <p:txBody>
+          <a:bodyPr rtlCol="0" anchor="ctr"/>
+          <a:lstStyle/>
+          <a:p>
+            <a:pPr algn="ctr"/>
+            <a:endParaRPr lang="en-US"/>
+          </a:p>
+        </p:txBody>
+      </p:sp>
+      <p:sp>
+        <p:nvSpPr>
+          <p:cNvPr id="3" name="Title 2">
+            <a:extLst>
+              <a:ext uri="{FF2B5EF4-FFF2-40B4-BE49-F238E27FC236}">
+                <a16:creationId xmlns:a16="http://schemas.microsoft.com/office/drawing/2014/main" id="{4272660D-85E5-6803-4200-5FD410431634}"/>
+              </a:ext>
+            </a:extLst>
+          </p:cNvPr>
+          <p:cNvSpPr>
+            <a:spLocks noGrp="1"/>
+          </p:cNvSpPr>
+          <p:nvPr>
+            <p:ph type="title"/>
+          </p:nvPr>
+        </p:nvSpPr>
+        <p:spPr>
+          <a:xfrm>
+            <a:off x="838200" y="184805"/>
+            <a:ext cx="10515600" cy="1505883"/>
+          </a:xfrm>
+        </p:spPr>
+        <p:txBody>
+          <a:bodyPr anchor="ctr">
+            <a:normAutofit/>
+          </a:bodyPr>
+          <a:lstStyle/>
+          <a:p>
+            <a:r>
+              <a:rPr lang="en-IN" sz="5200"/>
+              <a:t>DFS Traversals (Core Skill) -</a:t>
+            </a:r>
+            <a:r>
+              <a:rPr lang="en-IN" sz="5400">
+                <a:solidFill>
+                  <a:srgbClr val="FF0000"/>
+                </a:solidFill>
+              </a:rPr>
+              <a:t>Inorder</a:t>
+            </a:r>
+            <a:endParaRPr lang="en-IN" sz="5200" dirty="0">
+              <a:solidFill>
+                <a:srgbClr val="FF0000"/>
+              </a:solidFill>
+            </a:endParaRPr>
+          </a:p>
+        </p:txBody>
+      </p:sp>
+      <p:sp>
+        <p:nvSpPr>
+          <p:cNvPr id="7" name="TextBox 6">
+            <a:extLst>
+              <a:ext uri="{FF2B5EF4-FFF2-40B4-BE49-F238E27FC236}">
+                <a16:creationId xmlns:a16="http://schemas.microsoft.com/office/drawing/2014/main" id="{084432DB-0B0C-1C22-84E7-0EEA595FAC5F}"/>
+              </a:ext>
+            </a:extLst>
+          </p:cNvPr>
+          <p:cNvSpPr txBox="1"/>
+          <p:nvPr/>
+        </p:nvSpPr>
+        <p:spPr>
+          <a:xfrm>
+            <a:off x="8770374" y="1321356"/>
+            <a:ext cx="2153265" cy="369332"/>
+          </a:xfrm>
+          <a:prstGeom prst="rect">
+            <a:avLst/>
+          </a:prstGeom>
+        </p:spPr>
+        <p:style>
+          <a:lnRef idx="2">
+            <a:schemeClr val="accent3">
+              <a:shade val="15000"/>
+            </a:schemeClr>
+          </a:lnRef>
+          <a:fillRef idx="1">
+            <a:schemeClr val="accent3"/>
+          </a:fillRef>
+          <a:effectRef idx="0">
+            <a:schemeClr val="accent3"/>
+          </a:effectRef>
+          <a:fontRef idx="minor">
+            <a:schemeClr val="lt1"/>
+          </a:fontRef>
+        </p:style>
+        <p:txBody>
+          <a:bodyPr wrap="square">
+            <a:spAutoFit/>
+          </a:bodyPr>
+          <a:lstStyle/>
+          <a:p>
+            <a:r>
+              <a:rPr lang="en-IN" dirty="0"/>
+              <a:t>Left → Root → Right</a:t>
+            </a:r>
+          </a:p>
+        </p:txBody>
+      </p:sp>
+      <p:pic>
+        <p:nvPicPr>
+          <p:cNvPr id="4" name="Picture 3">
+            <a:extLst>
+              <a:ext uri="{FF2B5EF4-FFF2-40B4-BE49-F238E27FC236}">
+                <a16:creationId xmlns:a16="http://schemas.microsoft.com/office/drawing/2014/main" id="{D75CDAB3-F56C-7EB9-A32F-47185C413160}"/>
+              </a:ext>
+            </a:extLst>
+          </p:cNvPr>
+          <p:cNvPicPr>
+            <a:picLocks noChangeAspect="1"/>
+          </p:cNvPicPr>
+          <p:nvPr/>
+        </p:nvPicPr>
+        <p:blipFill>
+          <a:blip r:embed="rId2"/>
+          <a:stretch>
+            <a:fillRect/>
+          </a:stretch>
+        </p:blipFill>
+        <p:spPr>
+          <a:xfrm>
+            <a:off x="1455172" y="2263721"/>
+            <a:ext cx="9674785" cy="3625802"/>
+          </a:xfrm>
+          <a:prstGeom prst="rect">
+            <a:avLst/>
+          </a:prstGeom>
+        </p:spPr>
+      </p:pic>
+    </p:spTree>
+    <p:extLst>
+      <p:ext uri="{BB962C8B-B14F-4D97-AF65-F5344CB8AC3E}">
+        <p14:creationId xmlns:p14="http://schemas.microsoft.com/office/powerpoint/2010/main" val="151991523"/>
+      </p:ext>
+    </p:extLst>
+  </p:cSld>
+  <p:clrMapOvr>
+    <a:masterClrMapping/>
+  </p:clrMapOvr>
+</p:sld>
+</file>
+
+<file path=ppt/slides/slide19.xml><?xml version="1.0" encoding="utf-8"?>
+<p:sld xmlns:a="http://schemas.openxmlformats.org/drawingml/2006/main" xmlns:r="http://schemas.openxmlformats.org/officeDocument/2006/relationships" xmlns:p="http://schemas.openxmlformats.org/presentationml/2006/main">
+  <p:cSld>
+    <p:bg>
+      <p:bgPr>
+        <a:solidFill>
+          <a:schemeClr val="bg1"/>
+        </a:solidFill>
+        <a:effectLst/>
+      </p:bgPr>
+    </p:bg>
+    <p:spTree>
+      <p:nvGrpSpPr>
+        <p:cNvPr id="1" name="">
+          <a:extLst>
+            <a:ext uri="{FF2B5EF4-FFF2-40B4-BE49-F238E27FC236}">
+              <a16:creationId xmlns:a16="http://schemas.microsoft.com/office/drawing/2014/main" id="{DA7C27EA-6C54-C6E2-D79D-677806689554}"/>
+            </a:ext>
+          </a:extLst>
+        </p:cNvPr>
+        <p:cNvGrpSpPr/>
+        <p:nvPr/>
+      </p:nvGrpSpPr>
+      <p:grpSpPr>
+        <a:xfrm>
+          <a:off x="0" y="0"/>
+          <a:ext cx="0" cy="0"/>
+          <a:chOff x="0" y="0"/>
+          <a:chExt cx="0" cy="0"/>
+        </a:xfrm>
+      </p:grpSpPr>
+      <p:sp useBgFill="1">
+        <p:nvSpPr>
+          <p:cNvPr id="10" name="Rectangle 9">
+            <a:extLst>
+              <a:ext uri="{FF2B5EF4-FFF2-40B4-BE49-F238E27FC236}">
+                <a16:creationId xmlns:a16="http://schemas.microsoft.com/office/drawing/2014/main" id="{1020E5F9-D54D-A79B-5628-F9FF187F0341}"/>
+              </a:ext>
+              <a:ext uri="{C183D7F6-B498-43B3-948B-1728B52AA6E4}">
+                <adec:decorative xmlns:adec="http://schemas.microsoft.com/office/drawing/2017/decorative" val="1"/>
+              </a:ext>
+            </a:extLst>
+          </p:cNvPr>
+          <p:cNvSpPr>
+            <a:spLocks noGrp="1" noRot="1" noChangeAspect="1" noMove="1" noResize="1" noEditPoints="1" noAdjustHandles="1" noChangeArrowheads="1" noChangeShapeType="1" noTextEdit="1"/>
+          </p:cNvSpPr>
+          <p:nvPr>
+            <p:extLst>
+              <p:ext uri="{386F3935-93C4-4BCD-93E2-E3B085C9AB24}">
+                <p16:designElem xmlns:p16="http://schemas.microsoft.com/office/powerpoint/2015/main" val="1"/>
+              </p:ext>
+            </p:extLst>
+          </p:nvPr>
+        </p:nvSpPr>
+        <p:spPr>
+          <a:xfrm>
+            <a:off x="0" y="0"/>
+            <a:ext cx="12188952" cy="6858000"/>
+          </a:xfrm>
+          <a:prstGeom prst="rect">
+            <a:avLst/>
+          </a:prstGeom>
+          <a:ln>
+            <a:noFill/>
+          </a:ln>
+        </p:spPr>
+        <p:style>
+          <a:lnRef idx="2">
+            <a:schemeClr val="accent1">
+              <a:shade val="50000"/>
+            </a:schemeClr>
+          </a:lnRef>
+          <a:fillRef idx="1">
+            <a:schemeClr val="accent1"/>
+          </a:fillRef>
+          <a:effectRef idx="0">
+            <a:schemeClr val="accent1"/>
+          </a:effectRef>
+          <a:fontRef idx="minor">
+            <a:schemeClr val="lt1"/>
+          </a:fontRef>
+        </p:style>
+        <p:txBody>
+          <a:bodyPr rtlCol="0" anchor="ctr"/>
+          <a:lstStyle/>
+          <a:p>
+            <a:pPr algn="ctr"/>
+            <a:endParaRPr lang="en-US"/>
+          </a:p>
+        </p:txBody>
+      </p:sp>
+      <p:sp>
+        <p:nvSpPr>
+          <p:cNvPr id="3" name="Title 2">
+            <a:extLst>
+              <a:ext uri="{FF2B5EF4-FFF2-40B4-BE49-F238E27FC236}">
+                <a16:creationId xmlns:a16="http://schemas.microsoft.com/office/drawing/2014/main" id="{F9CE1F6F-4E8D-9EF6-04C5-F425D27F3B3F}"/>
+              </a:ext>
+            </a:extLst>
+          </p:cNvPr>
+          <p:cNvSpPr>
+            <a:spLocks noGrp="1"/>
+          </p:cNvSpPr>
+          <p:nvPr>
+            <p:ph type="title"/>
+          </p:nvPr>
+        </p:nvSpPr>
+        <p:spPr>
+          <a:xfrm>
+            <a:off x="838200" y="184805"/>
+            <a:ext cx="10515600" cy="1505883"/>
+          </a:xfrm>
+        </p:spPr>
+        <p:txBody>
+          <a:bodyPr anchor="ctr">
+            <a:normAutofit/>
+          </a:bodyPr>
+          <a:lstStyle/>
+          <a:p>
+            <a:r>
+              <a:rPr lang="en-IN" sz="5200" dirty="0"/>
+              <a:t>DFS Traversals (Core Skill) -</a:t>
+            </a:r>
+            <a:r>
+              <a:rPr lang="en-IN" sz="5400" dirty="0" err="1">
+                <a:solidFill>
+                  <a:srgbClr val="FF0000"/>
+                </a:solidFill>
+              </a:rPr>
+              <a:t>Postorder</a:t>
+            </a:r>
+            <a:endParaRPr lang="en-IN" sz="5200" dirty="0">
+              <a:solidFill>
+                <a:srgbClr val="FF0000"/>
+              </a:solidFill>
+            </a:endParaRPr>
+          </a:p>
+        </p:txBody>
+      </p:sp>
+      <p:sp>
+        <p:nvSpPr>
+          <p:cNvPr id="7" name="TextBox 6">
+            <a:extLst>
+              <a:ext uri="{FF2B5EF4-FFF2-40B4-BE49-F238E27FC236}">
+                <a16:creationId xmlns:a16="http://schemas.microsoft.com/office/drawing/2014/main" id="{1207106B-AE08-375F-EAAA-BAC039788A1C}"/>
+              </a:ext>
+            </a:extLst>
+          </p:cNvPr>
+          <p:cNvSpPr txBox="1"/>
+          <p:nvPr/>
+        </p:nvSpPr>
+        <p:spPr>
+          <a:xfrm>
+            <a:off x="8770374" y="1321356"/>
+            <a:ext cx="2153265" cy="369332"/>
+          </a:xfrm>
+          <a:prstGeom prst="rect">
+            <a:avLst/>
+          </a:prstGeom>
+        </p:spPr>
+        <p:style>
+          <a:lnRef idx="2">
+            <a:schemeClr val="accent3">
+              <a:shade val="15000"/>
+            </a:schemeClr>
+          </a:lnRef>
+          <a:fillRef idx="1">
+            <a:schemeClr val="accent3"/>
+          </a:fillRef>
+          <a:effectRef idx="0">
+            <a:schemeClr val="accent3"/>
+          </a:effectRef>
+          <a:fontRef idx="minor">
+            <a:schemeClr val="lt1"/>
+          </a:fontRef>
+        </p:style>
+        <p:txBody>
+          <a:bodyPr wrap="square">
+            <a:spAutoFit/>
+          </a:bodyPr>
+          <a:lstStyle/>
+          <a:p>
+            <a:r>
+              <a:rPr lang="en-IN" dirty="0"/>
+              <a:t>Left → Right → Root</a:t>
+            </a:r>
+          </a:p>
+        </p:txBody>
+      </p:sp>
+      <p:pic>
+        <p:nvPicPr>
+          <p:cNvPr id="5" name="Picture 4">
+            <a:extLst>
+              <a:ext uri="{FF2B5EF4-FFF2-40B4-BE49-F238E27FC236}">
+                <a16:creationId xmlns:a16="http://schemas.microsoft.com/office/drawing/2014/main" id="{2861930D-1D33-9705-5993-A1BE2DB0FAE6}"/>
+              </a:ext>
+            </a:extLst>
+          </p:cNvPr>
+          <p:cNvPicPr>
+            <a:picLocks noChangeAspect="1"/>
+          </p:cNvPicPr>
+          <p:nvPr/>
+        </p:nvPicPr>
+        <p:blipFill>
+          <a:blip r:embed="rId2"/>
+          <a:stretch>
+            <a:fillRect/>
+          </a:stretch>
+        </p:blipFill>
+        <p:spPr>
+          <a:xfrm>
+            <a:off x="1576513" y="2035740"/>
+            <a:ext cx="9035926" cy="3963125"/>
+          </a:xfrm>
+          <a:prstGeom prst="rect">
+            <a:avLst/>
+          </a:prstGeom>
+        </p:spPr>
+      </p:pic>
+    </p:spTree>
+    <p:extLst>
+      <p:ext uri="{BB962C8B-B14F-4D97-AF65-F5344CB8AC3E}">
+        <p14:creationId xmlns:p14="http://schemas.microsoft.com/office/powerpoint/2010/main" val="3108583917"/>
+      </p:ext>
+    </p:extLst>
+  </p:cSld>
+  <p:clrMapOvr>
+    <a:masterClrMapping/>
+  </p:clrMapOvr>
 </p:sld>
 </file>
 
@@ -5528,6 +8641,1262 @@
 </p:sld>
 </file>
 
+<file path=ppt/slides/slide20.xml><?xml version="1.0" encoding="utf-8"?>
+<p:sld xmlns:a="http://schemas.openxmlformats.org/drawingml/2006/main" xmlns:r="http://schemas.openxmlformats.org/officeDocument/2006/relationships" xmlns:p="http://schemas.openxmlformats.org/presentationml/2006/main">
+  <p:cSld>
+    <p:spTree>
+      <p:nvGrpSpPr>
+        <p:cNvPr id="1" name=""/>
+        <p:cNvGrpSpPr/>
+        <p:nvPr/>
+      </p:nvGrpSpPr>
+      <p:grpSpPr>
+        <a:xfrm>
+          <a:off x="0" y="0"/>
+          <a:ext cx="0" cy="0"/>
+          <a:chOff x="0" y="0"/>
+          <a:chExt cx="0" cy="0"/>
+        </a:xfrm>
+      </p:grpSpPr>
+      <p:sp>
+        <p:nvSpPr>
+          <p:cNvPr id="2" name="Title 1">
+            <a:extLst>
+              <a:ext uri="{FF2B5EF4-FFF2-40B4-BE49-F238E27FC236}">
+                <a16:creationId xmlns:a16="http://schemas.microsoft.com/office/drawing/2014/main" id="{E12E99AF-8DA5-6ABB-A968-9B72219318CB}"/>
+              </a:ext>
+            </a:extLst>
+          </p:cNvPr>
+          <p:cNvSpPr>
+            <a:spLocks noGrp="1"/>
+          </p:cNvSpPr>
+          <p:nvPr>
+            <p:ph type="title"/>
+          </p:nvPr>
+        </p:nvSpPr>
+        <p:spPr>
+          <a:xfrm>
+            <a:off x="926690" y="2766218"/>
+            <a:ext cx="10515600" cy="1325563"/>
+          </a:xfrm>
+        </p:spPr>
+        <p:txBody>
+          <a:bodyPr>
+            <a:normAutofit fontScale="90000"/>
+          </a:bodyPr>
+          <a:lstStyle/>
+          <a:p>
+            <a:r>
+              <a:rPr lang="en-US" dirty="0"/>
+              <a:t>Assignment: </a:t>
+            </a:r>
+            <a:br>
+              <a:rPr lang="en-US" dirty="0"/>
+            </a:br>
+            <a:br>
+              <a:rPr lang="en-US" dirty="0"/>
+            </a:br>
+            <a:r>
+              <a:rPr lang="en-US" dirty="0"/>
+              <a:t>write the solution using each order</a:t>
+            </a:r>
+            <a:br>
+              <a:rPr lang="en-US" dirty="0"/>
+            </a:br>
+            <a:br>
+              <a:rPr lang="en-US" dirty="0"/>
+            </a:br>
+            <a:r>
+              <a:rPr lang="en-US" dirty="0"/>
+              <a:t>Preorder</a:t>
+            </a:r>
+            <a:br>
+              <a:rPr lang="en-US" dirty="0"/>
+            </a:br>
+            <a:r>
+              <a:rPr lang="en-US" dirty="0" err="1"/>
+              <a:t>Inorder</a:t>
+            </a:r>
+            <a:br>
+              <a:rPr lang="en-US" dirty="0"/>
+            </a:br>
+            <a:r>
+              <a:rPr lang="en-US" dirty="0" err="1"/>
+              <a:t>postorder</a:t>
+            </a:r>
+            <a:br>
+              <a:rPr lang="en-US" dirty="0"/>
+            </a:br>
+            <a:br>
+              <a:rPr lang="en-US" dirty="0"/>
+            </a:br>
+            <a:endParaRPr lang="en-IN" dirty="0"/>
+          </a:p>
+        </p:txBody>
+      </p:sp>
+      <p:pic>
+        <p:nvPicPr>
+          <p:cNvPr id="4" name="Picture 3">
+            <a:extLst>
+              <a:ext uri="{FF2B5EF4-FFF2-40B4-BE49-F238E27FC236}">
+                <a16:creationId xmlns:a16="http://schemas.microsoft.com/office/drawing/2014/main" id="{E0879B40-E3EB-B7B9-0BDD-25F55EBE231C}"/>
+              </a:ext>
+            </a:extLst>
+          </p:cNvPr>
+          <p:cNvPicPr>
+            <a:picLocks noChangeAspect="1"/>
+          </p:cNvPicPr>
+          <p:nvPr/>
+        </p:nvPicPr>
+        <p:blipFill>
+          <a:blip r:embed="rId2"/>
+          <a:stretch>
+            <a:fillRect/>
+          </a:stretch>
+        </p:blipFill>
+        <p:spPr>
+          <a:xfrm>
+            <a:off x="5415960" y="3184026"/>
+            <a:ext cx="1124107" cy="1276528"/>
+          </a:xfrm>
+          <a:prstGeom prst="rect">
+            <a:avLst/>
+          </a:prstGeom>
+          <a:ln>
+            <a:noFill/>
+          </a:ln>
+          <a:effectLst>
+            <a:outerShdw blurRad="292100" dist="139700" dir="2700000" algn="tl" rotWithShape="0">
+              <a:srgbClr val="333333">
+                <a:alpha val="65000"/>
+              </a:srgbClr>
+            </a:outerShdw>
+          </a:effectLst>
+        </p:spPr>
+      </p:pic>
+    </p:spTree>
+    <p:extLst>
+      <p:ext uri="{BB962C8B-B14F-4D97-AF65-F5344CB8AC3E}">
+        <p14:creationId xmlns:p14="http://schemas.microsoft.com/office/powerpoint/2010/main" val="1867904022"/>
+      </p:ext>
+    </p:extLst>
+  </p:cSld>
+  <p:clrMapOvr>
+    <a:masterClrMapping/>
+  </p:clrMapOvr>
+</p:sld>
+</file>
+
+<file path=ppt/slides/slide21.xml><?xml version="1.0" encoding="utf-8"?>
+<p:sld xmlns:a="http://schemas.openxmlformats.org/drawingml/2006/main" xmlns:r="http://schemas.openxmlformats.org/officeDocument/2006/relationships" xmlns:p="http://schemas.openxmlformats.org/presentationml/2006/main">
+  <p:cSld>
+    <p:bg>
+      <p:bgPr>
+        <a:solidFill>
+          <a:schemeClr val="bg1"/>
+        </a:solidFill>
+        <a:effectLst/>
+      </p:bgPr>
+    </p:bg>
+    <p:spTree>
+      <p:nvGrpSpPr>
+        <p:cNvPr id="1" name=""/>
+        <p:cNvGrpSpPr/>
+        <p:nvPr/>
+      </p:nvGrpSpPr>
+      <p:grpSpPr>
+        <a:xfrm>
+          <a:off x="0" y="0"/>
+          <a:ext cx="0" cy="0"/>
+          <a:chOff x="0" y="0"/>
+          <a:chExt cx="0" cy="0"/>
+        </a:xfrm>
+      </p:grpSpPr>
+      <p:sp>
+        <p:nvSpPr>
+          <p:cNvPr id="9" name="Down Arrow 7">
+            <a:extLst>
+              <a:ext uri="{FF2B5EF4-FFF2-40B4-BE49-F238E27FC236}">
+                <a16:creationId xmlns:a16="http://schemas.microsoft.com/office/drawing/2014/main" id="{D4771268-CB57-404A-9271-370EB28F6090}"/>
+              </a:ext>
+              <a:ext uri="{C183D7F6-B498-43B3-948B-1728B52AA6E4}">
+                <adec:decorative xmlns:adec="http://schemas.microsoft.com/office/drawing/2017/decorative" val="1"/>
+              </a:ext>
+            </a:extLst>
+          </p:cNvPr>
+          <p:cNvSpPr>
+            <a:spLocks noGrp="1" noRot="1" noChangeAspect="1" noMove="1" noResize="1" noEditPoints="1" noAdjustHandles="1" noChangeArrowheads="1" noChangeShapeType="1" noTextEdit="1"/>
+          </p:cNvSpPr>
+          <p:nvPr>
+            <p:extLst>
+              <p:ext uri="{386F3935-93C4-4BCD-93E2-E3B085C9AB24}">
+                <p16:designElem xmlns:p16="http://schemas.microsoft.com/office/powerpoint/2015/main" val="1"/>
+              </p:ext>
+            </p:extLst>
+          </p:nvPr>
+        </p:nvSpPr>
+        <p:spPr>
+          <a:xfrm rot="16200000">
+            <a:off x="800100" y="1491343"/>
+            <a:ext cx="3333749" cy="3499103"/>
+          </a:xfrm>
+          <a:prstGeom prst="downArrow">
+            <a:avLst>
+              <a:gd name="adj1" fmla="val 100000"/>
+              <a:gd name="adj2" fmla="val 15788"/>
+            </a:avLst>
+          </a:prstGeom>
+          <a:solidFill>
+            <a:srgbClr val="404040"/>
+          </a:solidFill>
+          <a:ln w="53975">
+            <a:noFill/>
+          </a:ln>
+        </p:spPr>
+        <p:style>
+          <a:lnRef idx="2">
+            <a:schemeClr val="accent1">
+              <a:shade val="50000"/>
+            </a:schemeClr>
+          </a:lnRef>
+          <a:fillRef idx="1">
+            <a:schemeClr val="accent1"/>
+          </a:fillRef>
+          <a:effectRef idx="0">
+            <a:schemeClr val="accent1"/>
+          </a:effectRef>
+          <a:fontRef idx="minor">
+            <a:schemeClr val="lt1"/>
+          </a:fontRef>
+        </p:style>
+        <p:txBody>
+          <a:bodyPr rtlCol="0" anchor="ctr"/>
+          <a:lstStyle/>
+          <a:p>
+            <a:pPr algn="ctr"/>
+            <a:endParaRPr lang="en-US"/>
+          </a:p>
+        </p:txBody>
+      </p:sp>
+      <p:sp>
+        <p:nvSpPr>
+          <p:cNvPr id="2" name="Title 1">
+            <a:extLst>
+              <a:ext uri="{FF2B5EF4-FFF2-40B4-BE49-F238E27FC236}">
+                <a16:creationId xmlns:a16="http://schemas.microsoft.com/office/drawing/2014/main" id="{A0B86750-F36D-2004-8B86-8141DCAC55F0}"/>
+              </a:ext>
+            </a:extLst>
+          </p:cNvPr>
+          <p:cNvSpPr>
+            <a:spLocks noGrp="1"/>
+          </p:cNvSpPr>
+          <p:nvPr>
+            <p:ph type="title"/>
+          </p:nvPr>
+        </p:nvSpPr>
+        <p:spPr>
+          <a:xfrm>
+            <a:off x="1028700" y="1967266"/>
+            <a:ext cx="2628900" cy="2547257"/>
+          </a:xfrm>
+          <a:noFill/>
+        </p:spPr>
+        <p:txBody>
+          <a:bodyPr anchor="ctr">
+            <a:normAutofit/>
+          </a:bodyPr>
+          <a:lstStyle/>
+          <a:p>
+            <a:pPr algn="ctr"/>
+            <a:r>
+              <a:rPr lang="en-US" sz="3600">
+                <a:solidFill>
+                  <a:srgbClr val="FFFFFF"/>
+                </a:solidFill>
+              </a:rPr>
+              <a:t>Recap</a:t>
+            </a:r>
+            <a:endParaRPr lang="en-IN" sz="3600">
+              <a:solidFill>
+                <a:srgbClr val="FFFFFF"/>
+              </a:solidFill>
+            </a:endParaRPr>
+          </a:p>
+        </p:txBody>
+      </p:sp>
+      <p:pic>
+        <p:nvPicPr>
+          <p:cNvPr id="4" name="Picture 3">
+            <a:extLst>
+              <a:ext uri="{FF2B5EF4-FFF2-40B4-BE49-F238E27FC236}">
+                <a16:creationId xmlns:a16="http://schemas.microsoft.com/office/drawing/2014/main" id="{D68A546A-47A7-C201-5A56-03442ADD536A}"/>
+              </a:ext>
+            </a:extLst>
+          </p:cNvPr>
+          <p:cNvPicPr>
+            <a:picLocks noChangeAspect="1"/>
+          </p:cNvPicPr>
+          <p:nvPr/>
+        </p:nvPicPr>
+        <p:blipFill>
+          <a:blip r:embed="rId2"/>
+          <a:stretch>
+            <a:fillRect/>
+          </a:stretch>
+        </p:blipFill>
+        <p:spPr>
+          <a:xfrm>
+            <a:off x="4777316" y="701330"/>
+            <a:ext cx="6780700" cy="5453011"/>
+          </a:xfrm>
+          <a:prstGeom prst="rect">
+            <a:avLst/>
+          </a:prstGeom>
+        </p:spPr>
+      </p:pic>
+    </p:spTree>
+    <p:extLst>
+      <p:ext uri="{BB962C8B-B14F-4D97-AF65-F5344CB8AC3E}">
+        <p14:creationId xmlns:p14="http://schemas.microsoft.com/office/powerpoint/2010/main" val="1528364874"/>
+      </p:ext>
+    </p:extLst>
+  </p:cSld>
+  <p:clrMapOvr>
+    <a:masterClrMapping/>
+  </p:clrMapOvr>
+</p:sld>
+</file>
+
+<file path=ppt/slides/slide22.xml><?xml version="1.0" encoding="utf-8"?>
+<p:sld xmlns:a="http://schemas.openxmlformats.org/drawingml/2006/main" xmlns:r="http://schemas.openxmlformats.org/officeDocument/2006/relationships" xmlns:p="http://schemas.openxmlformats.org/presentationml/2006/main">
+  <p:cSld>
+    <p:bg>
+      <p:bgPr>
+        <a:solidFill>
+          <a:schemeClr val="bg1"/>
+        </a:solidFill>
+        <a:effectLst/>
+      </p:bgPr>
+    </p:bg>
+    <p:spTree>
+      <p:nvGrpSpPr>
+        <p:cNvPr id="1" name=""/>
+        <p:cNvGrpSpPr/>
+        <p:nvPr/>
+      </p:nvGrpSpPr>
+      <p:grpSpPr>
+        <a:xfrm>
+          <a:off x="0" y="0"/>
+          <a:ext cx="0" cy="0"/>
+          <a:chOff x="0" y="0"/>
+          <a:chExt cx="0" cy="0"/>
+        </a:xfrm>
+      </p:grpSpPr>
+      <p:sp useBgFill="1">
+        <p:nvSpPr>
+          <p:cNvPr id="9" name="Rectangle 8">
+            <a:extLst>
+              <a:ext uri="{FF2B5EF4-FFF2-40B4-BE49-F238E27FC236}">
+                <a16:creationId xmlns:a16="http://schemas.microsoft.com/office/drawing/2014/main" id="{BCED4D40-4B67-4331-AC48-79B82B4A47D8}"/>
+              </a:ext>
+              <a:ext uri="{C183D7F6-B498-43B3-948B-1728B52AA6E4}">
+                <adec:decorative xmlns:adec="http://schemas.microsoft.com/office/drawing/2017/decorative" val="1"/>
+              </a:ext>
+            </a:extLst>
+          </p:cNvPr>
+          <p:cNvSpPr>
+            <a:spLocks noGrp="1" noRot="1" noChangeAspect="1" noMove="1" noResize="1" noEditPoints="1" noAdjustHandles="1" noChangeArrowheads="1" noChangeShapeType="1" noTextEdit="1"/>
+          </p:cNvSpPr>
+          <p:nvPr>
+            <p:extLst>
+              <p:ext uri="{386F3935-93C4-4BCD-93E2-E3B085C9AB24}">
+                <p16:designElem xmlns:p16="http://schemas.microsoft.com/office/powerpoint/2015/main" val="1"/>
+              </p:ext>
+            </p:extLst>
+          </p:nvPr>
+        </p:nvSpPr>
+        <p:spPr>
+          <a:xfrm>
+            <a:off x="0" y="0"/>
+            <a:ext cx="12192000" cy="6858000"/>
+          </a:xfrm>
+          <a:prstGeom prst="rect">
+            <a:avLst/>
+          </a:prstGeom>
+          <a:ln>
+            <a:noFill/>
+          </a:ln>
+        </p:spPr>
+        <p:style>
+          <a:lnRef idx="2">
+            <a:schemeClr val="accent1">
+              <a:shade val="50000"/>
+            </a:schemeClr>
+          </a:lnRef>
+          <a:fillRef idx="1">
+            <a:schemeClr val="accent1"/>
+          </a:fillRef>
+          <a:effectRef idx="0">
+            <a:schemeClr val="accent1"/>
+          </a:effectRef>
+          <a:fontRef idx="minor">
+            <a:schemeClr val="lt1"/>
+          </a:fontRef>
+        </p:style>
+        <p:txBody>
+          <a:bodyPr rtlCol="0" anchor="ctr"/>
+          <a:lstStyle/>
+          <a:p>
+            <a:pPr algn="ctr"/>
+            <a:endParaRPr lang="en-US"/>
+          </a:p>
+        </p:txBody>
+      </p:sp>
+      <p:sp>
+        <p:nvSpPr>
+          <p:cNvPr id="2" name="Title 1">
+            <a:extLst>
+              <a:ext uri="{FF2B5EF4-FFF2-40B4-BE49-F238E27FC236}">
+                <a16:creationId xmlns:a16="http://schemas.microsoft.com/office/drawing/2014/main" id="{D48F4733-A87E-F47F-128A-2978D5362DF1}"/>
+              </a:ext>
+            </a:extLst>
+          </p:cNvPr>
+          <p:cNvSpPr>
+            <a:spLocks noGrp="1"/>
+          </p:cNvSpPr>
+          <p:nvPr>
+            <p:ph type="title"/>
+          </p:nvPr>
+        </p:nvSpPr>
+        <p:spPr>
+          <a:xfrm>
+            <a:off x="638881" y="417576"/>
+            <a:ext cx="10909640" cy="1249394"/>
+          </a:xfrm>
+        </p:spPr>
+        <p:txBody>
+          <a:bodyPr vert="horz" lIns="91440" tIns="45720" rIns="91440" bIns="45720" rtlCol="0" anchor="ctr">
+            <a:normAutofit/>
+          </a:bodyPr>
+          <a:lstStyle/>
+          <a:p>
+            <a:pPr algn="ctr"/>
+            <a:r>
+              <a:rPr lang="en-US" sz="5600" kern="1200">
+                <a:solidFill>
+                  <a:schemeClr val="tx1"/>
+                </a:solidFill>
+                <a:latin typeface="+mj-lt"/>
+                <a:ea typeface="+mj-ea"/>
+                <a:cs typeface="+mj-cs"/>
+              </a:rPr>
+              <a:t>Find maximum depth of binary tree</a:t>
+            </a:r>
+          </a:p>
+        </p:txBody>
+      </p:sp>
+      <p:sp>
+        <p:nvSpPr>
+          <p:cNvPr id="11" name="sketch line">
+            <a:extLst>
+              <a:ext uri="{FF2B5EF4-FFF2-40B4-BE49-F238E27FC236}">
+                <a16:creationId xmlns:a16="http://schemas.microsoft.com/office/drawing/2014/main" id="{670CEDEF-4F34-412E-84EE-329C1E936AF5}"/>
+              </a:ext>
+              <a:ext uri="{C183D7F6-B498-43B3-948B-1728B52AA6E4}">
+                <adec:decorative xmlns:adec="http://schemas.microsoft.com/office/drawing/2017/decorative" val="1"/>
+              </a:ext>
+            </a:extLst>
+          </p:cNvPr>
+          <p:cNvSpPr>
+            <a:spLocks noGrp="1" noRot="1" noChangeAspect="1" noMove="1" noResize="1" noEditPoints="1" noAdjustHandles="1" noChangeArrowheads="1" noChangeShapeType="1" noTextEdit="1"/>
+          </p:cNvSpPr>
+          <p:nvPr>
+            <p:extLst>
+              <p:ext uri="{386F3935-93C4-4BCD-93E2-E3B085C9AB24}">
+                <p16:designElem xmlns:p16="http://schemas.microsoft.com/office/powerpoint/2015/main" val="1"/>
+              </p:ext>
+            </p:extLst>
+          </p:nvPr>
+        </p:nvSpPr>
+        <p:spPr>
+          <a:xfrm>
+            <a:off x="3807702" y="1733454"/>
+            <a:ext cx="4572000" cy="18288"/>
+          </a:xfrm>
+          <a:custGeom>
+            <a:avLst/>
+            <a:gdLst>
+              <a:gd name="csX0" fmla="*/ 0 w 4572000"/>
+              <a:gd name="csY0" fmla="*/ 0 h 18288"/>
+              <a:gd name="csX1" fmla="*/ 515983 w 4572000"/>
+              <a:gd name="csY1" fmla="*/ 0 h 18288"/>
+              <a:gd name="csX2" fmla="*/ 1031966 w 4572000"/>
+              <a:gd name="csY2" fmla="*/ 0 h 18288"/>
+              <a:gd name="csX3" fmla="*/ 1639389 w 4572000"/>
+              <a:gd name="csY3" fmla="*/ 0 h 18288"/>
+              <a:gd name="csX4" fmla="*/ 2383971 w 4572000"/>
+              <a:gd name="csY4" fmla="*/ 0 h 18288"/>
+              <a:gd name="csX5" fmla="*/ 2945674 w 4572000"/>
+              <a:gd name="csY5" fmla="*/ 0 h 18288"/>
+              <a:gd name="csX6" fmla="*/ 3507377 w 4572000"/>
+              <a:gd name="csY6" fmla="*/ 0 h 18288"/>
+              <a:gd name="csX7" fmla="*/ 4572000 w 4572000"/>
+              <a:gd name="csY7" fmla="*/ 0 h 18288"/>
+              <a:gd name="csX8" fmla="*/ 4572000 w 4572000"/>
+              <a:gd name="csY8" fmla="*/ 18288 h 18288"/>
+              <a:gd name="csX9" fmla="*/ 3873137 w 4572000"/>
+              <a:gd name="csY9" fmla="*/ 18288 h 18288"/>
+              <a:gd name="csX10" fmla="*/ 3311434 w 4572000"/>
+              <a:gd name="csY10" fmla="*/ 18288 h 18288"/>
+              <a:gd name="csX11" fmla="*/ 2749731 w 4572000"/>
+              <a:gd name="csY11" fmla="*/ 18288 h 18288"/>
+              <a:gd name="csX12" fmla="*/ 2050869 w 4572000"/>
+              <a:gd name="csY12" fmla="*/ 18288 h 18288"/>
+              <a:gd name="csX13" fmla="*/ 1306286 w 4572000"/>
+              <a:gd name="csY13" fmla="*/ 18288 h 18288"/>
+              <a:gd name="csX14" fmla="*/ 790303 w 4572000"/>
+              <a:gd name="csY14" fmla="*/ 18288 h 18288"/>
+              <a:gd name="csX15" fmla="*/ 0 w 4572000"/>
+              <a:gd name="csY15" fmla="*/ 18288 h 18288"/>
+              <a:gd name="csX16" fmla="*/ 0 w 4572000"/>
+              <a:gd name="csY16" fmla="*/ 0 h 18288"/>
+            </a:gdLst>
+            <a:ahLst/>
+            <a:cxnLst>
+              <a:cxn ang="0">
+                <a:pos x="csX0" y="csY0"/>
+              </a:cxn>
+              <a:cxn ang="0">
+                <a:pos x="csX1" y="csY1"/>
+              </a:cxn>
+              <a:cxn ang="0">
+                <a:pos x="csX2" y="csY2"/>
+              </a:cxn>
+              <a:cxn ang="0">
+                <a:pos x="csX3" y="csY3"/>
+              </a:cxn>
+              <a:cxn ang="0">
+                <a:pos x="csX4" y="csY4"/>
+              </a:cxn>
+              <a:cxn ang="0">
+                <a:pos x="csX5" y="csY5"/>
+              </a:cxn>
+              <a:cxn ang="0">
+                <a:pos x="csX6" y="csY6"/>
+              </a:cxn>
+              <a:cxn ang="0">
+                <a:pos x="csX7" y="csY7"/>
+              </a:cxn>
+              <a:cxn ang="0">
+                <a:pos x="csX8" y="csY8"/>
+              </a:cxn>
+              <a:cxn ang="0">
+                <a:pos x="csX9" y="csY9"/>
+              </a:cxn>
+              <a:cxn ang="0">
+                <a:pos x="csX10" y="csY10"/>
+              </a:cxn>
+              <a:cxn ang="0">
+                <a:pos x="csX11" y="csY11"/>
+              </a:cxn>
+              <a:cxn ang="0">
+                <a:pos x="csX12" y="csY12"/>
+              </a:cxn>
+              <a:cxn ang="0">
+                <a:pos x="csX13" y="csY13"/>
+              </a:cxn>
+              <a:cxn ang="0">
+                <a:pos x="csX14" y="csY14"/>
+              </a:cxn>
+              <a:cxn ang="0">
+                <a:pos x="csX15" y="csY15"/>
+              </a:cxn>
+              <a:cxn ang="0">
+                <a:pos x="csX16" y="csY16"/>
+              </a:cxn>
+            </a:cxnLst>
+            <a:rect l="l" t="t" r="r" b="b"/>
+            <a:pathLst>
+              <a:path w="4572000" h="18288" fill="none" extrusionOk="0">
+                <a:moveTo>
+                  <a:pt x="0" y="0"/>
+                </a:moveTo>
+                <a:cubicBezTo>
+                  <a:pt x="105156" y="-20963"/>
+                  <a:pt x="340432" y="822"/>
+                  <a:pt x="515983" y="0"/>
+                </a:cubicBezTo>
+                <a:cubicBezTo>
+                  <a:pt x="691534" y="-822"/>
+                  <a:pt x="850679" y="16479"/>
+                  <a:pt x="1031966" y="0"/>
+                </a:cubicBezTo>
+                <a:cubicBezTo>
+                  <a:pt x="1213253" y="-16479"/>
+                  <a:pt x="1443646" y="-18730"/>
+                  <a:pt x="1639389" y="0"/>
+                </a:cubicBezTo>
+                <a:cubicBezTo>
+                  <a:pt x="1835132" y="18730"/>
+                  <a:pt x="2159975" y="18531"/>
+                  <a:pt x="2383971" y="0"/>
+                </a:cubicBezTo>
+                <a:cubicBezTo>
+                  <a:pt x="2607967" y="-18531"/>
+                  <a:pt x="2719096" y="-12030"/>
+                  <a:pt x="2945674" y="0"/>
+                </a:cubicBezTo>
+                <a:cubicBezTo>
+                  <a:pt x="3172252" y="12030"/>
+                  <a:pt x="3269167" y="27666"/>
+                  <a:pt x="3507377" y="0"/>
+                </a:cubicBezTo>
+                <a:cubicBezTo>
+                  <a:pt x="3745587" y="-27666"/>
+                  <a:pt x="4116741" y="18705"/>
+                  <a:pt x="4572000" y="0"/>
+                </a:cubicBezTo>
+                <a:cubicBezTo>
+                  <a:pt x="4572895" y="8974"/>
+                  <a:pt x="4571454" y="9359"/>
+                  <a:pt x="4572000" y="18288"/>
+                </a:cubicBezTo>
+                <a:cubicBezTo>
+                  <a:pt x="4374698" y="3942"/>
+                  <a:pt x="4098874" y="-11042"/>
+                  <a:pt x="3873137" y="18288"/>
+                </a:cubicBezTo>
+                <a:cubicBezTo>
+                  <a:pt x="3647400" y="47618"/>
+                  <a:pt x="3517055" y="5421"/>
+                  <a:pt x="3311434" y="18288"/>
+                </a:cubicBezTo>
+                <a:cubicBezTo>
+                  <a:pt x="3105813" y="31155"/>
+                  <a:pt x="3025168" y="17856"/>
+                  <a:pt x="2749731" y="18288"/>
+                </a:cubicBezTo>
+                <a:cubicBezTo>
+                  <a:pt x="2474294" y="18720"/>
+                  <a:pt x="2291766" y="-14168"/>
+                  <a:pt x="2050869" y="18288"/>
+                </a:cubicBezTo>
+                <a:cubicBezTo>
+                  <a:pt x="1809972" y="50744"/>
+                  <a:pt x="1540276" y="46798"/>
+                  <a:pt x="1306286" y="18288"/>
+                </a:cubicBezTo>
+                <a:cubicBezTo>
+                  <a:pt x="1072296" y="-10222"/>
+                  <a:pt x="972445" y="19645"/>
+                  <a:pt x="790303" y="18288"/>
+                </a:cubicBezTo>
+                <a:cubicBezTo>
+                  <a:pt x="608161" y="16931"/>
+                  <a:pt x="200981" y="8241"/>
+                  <a:pt x="0" y="18288"/>
+                </a:cubicBezTo>
+                <a:cubicBezTo>
+                  <a:pt x="-229" y="14222"/>
+                  <a:pt x="509" y="5816"/>
+                  <a:pt x="0" y="0"/>
+                </a:cubicBezTo>
+                <a:close/>
+              </a:path>
+              <a:path w="4572000" h="18288" stroke="0" extrusionOk="0">
+                <a:moveTo>
+                  <a:pt x="0" y="0"/>
+                </a:moveTo>
+                <a:cubicBezTo>
+                  <a:pt x="143285" y="-9565"/>
+                  <a:pt x="327959" y="-11498"/>
+                  <a:pt x="561703" y="0"/>
+                </a:cubicBezTo>
+                <a:cubicBezTo>
+                  <a:pt x="795447" y="11498"/>
+                  <a:pt x="838260" y="18255"/>
+                  <a:pt x="1077686" y="0"/>
+                </a:cubicBezTo>
+                <a:cubicBezTo>
+                  <a:pt x="1317112" y="-18255"/>
+                  <a:pt x="1437472" y="23514"/>
+                  <a:pt x="1639389" y="0"/>
+                </a:cubicBezTo>
+                <a:cubicBezTo>
+                  <a:pt x="1841306" y="-23514"/>
+                  <a:pt x="2037142" y="-12551"/>
+                  <a:pt x="2292531" y="0"/>
+                </a:cubicBezTo>
+                <a:cubicBezTo>
+                  <a:pt x="2547920" y="12551"/>
+                  <a:pt x="2810436" y="-20352"/>
+                  <a:pt x="2991394" y="0"/>
+                </a:cubicBezTo>
+                <a:cubicBezTo>
+                  <a:pt x="3172352" y="20352"/>
+                  <a:pt x="3530025" y="-13347"/>
+                  <a:pt x="3735977" y="0"/>
+                </a:cubicBezTo>
+                <a:cubicBezTo>
+                  <a:pt x="3941929" y="13347"/>
+                  <a:pt x="4161497" y="34086"/>
+                  <a:pt x="4572000" y="0"/>
+                </a:cubicBezTo>
+                <a:cubicBezTo>
+                  <a:pt x="4571545" y="6162"/>
+                  <a:pt x="4571903" y="11775"/>
+                  <a:pt x="4572000" y="18288"/>
+                </a:cubicBezTo>
+                <a:cubicBezTo>
+                  <a:pt x="4228040" y="36490"/>
+                  <a:pt x="4199736" y="42557"/>
+                  <a:pt x="3873137" y="18288"/>
+                </a:cubicBezTo>
+                <a:cubicBezTo>
+                  <a:pt x="3546538" y="-5981"/>
+                  <a:pt x="3472124" y="16809"/>
+                  <a:pt x="3128554" y="18288"/>
+                </a:cubicBezTo>
+                <a:cubicBezTo>
+                  <a:pt x="2784984" y="19767"/>
+                  <a:pt x="2735896" y="-17781"/>
+                  <a:pt x="2383971" y="18288"/>
+                </a:cubicBezTo>
+                <a:cubicBezTo>
+                  <a:pt x="2032046" y="54357"/>
+                  <a:pt x="2019324" y="2920"/>
+                  <a:pt x="1867989" y="18288"/>
+                </a:cubicBezTo>
+                <a:cubicBezTo>
+                  <a:pt x="1716654" y="33656"/>
+                  <a:pt x="1418675" y="32575"/>
+                  <a:pt x="1169126" y="18288"/>
+                </a:cubicBezTo>
+                <a:cubicBezTo>
+                  <a:pt x="919577" y="4001"/>
+                  <a:pt x="798537" y="16165"/>
+                  <a:pt x="561703" y="18288"/>
+                </a:cubicBezTo>
+                <a:cubicBezTo>
+                  <a:pt x="324869" y="20411"/>
+                  <a:pt x="221395" y="-912"/>
+                  <a:pt x="0" y="18288"/>
+                </a:cubicBezTo>
+                <a:cubicBezTo>
+                  <a:pt x="766" y="10800"/>
+                  <a:pt x="-457" y="8180"/>
+                  <a:pt x="0" y="0"/>
+                </a:cubicBezTo>
+                <a:close/>
+              </a:path>
+            </a:pathLst>
+          </a:custGeom>
+          <a:solidFill>
+            <a:schemeClr val="accent2"/>
+          </a:solidFill>
+          <a:ln w="41275" cap="rnd">
+            <a:solidFill>
+              <a:schemeClr val="accent2"/>
+            </a:solidFill>
+            <a:round/>
+            <a:extLst>
+              <a:ext uri="{C807C97D-BFC1-408E-A445-0C87EB9F89A2}">
+                <ask:lineSketchStyleProps xmlns:ask="http://schemas.microsoft.com/office/drawing/2018/sketchyshapes" sd="2727557108">
+                  <a:prstGeom prst="rect">
+                    <a:avLst/>
+                  </a:prstGeom>
+                  <ask:type>
+                    <ask:lineSketchFreehand/>
+                  </ask:type>
+                </ask:lineSketchStyleProps>
+              </a:ext>
+            </a:extLst>
+          </a:ln>
+        </p:spPr>
+        <p:style>
+          <a:lnRef idx="2">
+            <a:schemeClr val="accent1">
+              <a:shade val="50000"/>
+            </a:schemeClr>
+          </a:lnRef>
+          <a:fillRef idx="1">
+            <a:schemeClr val="accent1"/>
+          </a:fillRef>
+          <a:effectRef idx="0">
+            <a:schemeClr val="accent1"/>
+          </a:effectRef>
+          <a:fontRef idx="minor">
+            <a:schemeClr val="lt1"/>
+          </a:fontRef>
+        </p:style>
+        <p:txBody>
+          <a:bodyPr rtlCol="0" anchor="ctr"/>
+          <a:lstStyle/>
+          <a:p>
+            <a:pPr algn="ctr"/>
+            <a:endParaRPr lang="en-US"/>
+          </a:p>
+        </p:txBody>
+      </p:sp>
+      <p:pic>
+        <p:nvPicPr>
+          <p:cNvPr id="4" name="Picture 3">
+            <a:extLst>
+              <a:ext uri="{FF2B5EF4-FFF2-40B4-BE49-F238E27FC236}">
+                <a16:creationId xmlns:a16="http://schemas.microsoft.com/office/drawing/2014/main" id="{B664AFE5-E528-F463-7011-12F549C27572}"/>
+              </a:ext>
+            </a:extLst>
+          </p:cNvPr>
+          <p:cNvPicPr>
+            <a:picLocks noChangeAspect="1"/>
+          </p:cNvPicPr>
+          <p:nvPr/>
+        </p:nvPicPr>
+        <p:blipFill>
+          <a:blip r:embed="rId2"/>
+          <a:stretch>
+            <a:fillRect/>
+          </a:stretch>
+        </p:blipFill>
+        <p:spPr>
+          <a:xfrm>
+            <a:off x="320040" y="2780934"/>
+            <a:ext cx="11548872" cy="3291429"/>
+          </a:xfrm>
+          <a:prstGeom prst="rect">
+            <a:avLst/>
+          </a:prstGeom>
+        </p:spPr>
+      </p:pic>
+    </p:spTree>
+    <p:extLst>
+      <p:ext uri="{BB962C8B-B14F-4D97-AF65-F5344CB8AC3E}">
+        <p14:creationId xmlns:p14="http://schemas.microsoft.com/office/powerpoint/2010/main" val="2281309782"/>
+      </p:ext>
+    </p:extLst>
+  </p:cSld>
+  <p:clrMapOvr>
+    <a:masterClrMapping/>
+  </p:clrMapOvr>
+</p:sld>
+</file>
+
+<file path=ppt/slides/slide23.xml><?xml version="1.0" encoding="utf-8"?>
+<p:sld xmlns:a="http://schemas.openxmlformats.org/drawingml/2006/main" xmlns:r="http://schemas.openxmlformats.org/officeDocument/2006/relationships" xmlns:p="http://schemas.openxmlformats.org/presentationml/2006/main">
+  <p:cSld>
+    <p:spTree>
+      <p:nvGrpSpPr>
+        <p:cNvPr id="1" name=""/>
+        <p:cNvGrpSpPr/>
+        <p:nvPr/>
+      </p:nvGrpSpPr>
+      <p:grpSpPr>
+        <a:xfrm>
+          <a:off x="0" y="0"/>
+          <a:ext cx="0" cy="0"/>
+          <a:chOff x="0" y="0"/>
+          <a:chExt cx="0" cy="0"/>
+        </a:xfrm>
+      </p:grpSpPr>
+      <p:sp>
+        <p:nvSpPr>
+          <p:cNvPr id="2" name="Title 1">
+            <a:extLst>
+              <a:ext uri="{FF2B5EF4-FFF2-40B4-BE49-F238E27FC236}">
+                <a16:creationId xmlns:a16="http://schemas.microsoft.com/office/drawing/2014/main" id="{85BEF9F2-9DF9-FB17-C07C-00AEF31A6C9F}"/>
+              </a:ext>
+            </a:extLst>
+          </p:cNvPr>
+          <p:cNvSpPr>
+            <a:spLocks noGrp="1"/>
+          </p:cNvSpPr>
+          <p:nvPr>
+            <p:ph type="title"/>
+          </p:nvPr>
+        </p:nvSpPr>
+        <p:spPr/>
+        <p:txBody>
+          <a:bodyPr/>
+          <a:lstStyle/>
+          <a:p>
+            <a:r>
+              <a:rPr lang="en-US" dirty="0"/>
+              <a:t>Tree</a:t>
+            </a:r>
+            <a:endParaRPr lang="en-IN" dirty="0"/>
+          </a:p>
+        </p:txBody>
+      </p:sp>
+      <p:pic>
+        <p:nvPicPr>
+          <p:cNvPr id="4" name="Picture 3">
+            <a:extLst>
+              <a:ext uri="{FF2B5EF4-FFF2-40B4-BE49-F238E27FC236}">
+                <a16:creationId xmlns:a16="http://schemas.microsoft.com/office/drawing/2014/main" id="{07E41DEA-9255-E557-6997-501120D0717D}"/>
+              </a:ext>
+            </a:extLst>
+          </p:cNvPr>
+          <p:cNvPicPr>
+            <a:picLocks noChangeAspect="1"/>
+          </p:cNvPicPr>
+          <p:nvPr/>
+        </p:nvPicPr>
+        <p:blipFill>
+          <a:blip r:embed="rId2"/>
+          <a:stretch>
+            <a:fillRect/>
+          </a:stretch>
+        </p:blipFill>
+        <p:spPr>
+          <a:xfrm>
+            <a:off x="1023214" y="2023165"/>
+            <a:ext cx="1571844" cy="1848108"/>
+          </a:xfrm>
+          <a:prstGeom prst="rect">
+            <a:avLst/>
+          </a:prstGeom>
+        </p:spPr>
+      </p:pic>
+      <p:sp>
+        <p:nvSpPr>
+          <p:cNvPr id="6" name="TextBox 5">
+            <a:extLst>
+              <a:ext uri="{FF2B5EF4-FFF2-40B4-BE49-F238E27FC236}">
+                <a16:creationId xmlns:a16="http://schemas.microsoft.com/office/drawing/2014/main" id="{B716D16E-C990-5B0B-114E-2FA54FFC8E47}"/>
+              </a:ext>
+            </a:extLst>
+          </p:cNvPr>
+          <p:cNvSpPr txBox="1"/>
+          <p:nvPr/>
+        </p:nvSpPr>
+        <p:spPr>
+          <a:xfrm>
+            <a:off x="3048000" y="2023165"/>
+            <a:ext cx="6096000" cy="646331"/>
+          </a:xfrm>
+          <a:prstGeom prst="rect">
+            <a:avLst/>
+          </a:prstGeom>
+        </p:spPr>
+        <p:style>
+          <a:lnRef idx="2">
+            <a:schemeClr val="accent2"/>
+          </a:lnRef>
+          <a:fillRef idx="1">
+            <a:schemeClr val="lt1"/>
+          </a:fillRef>
+          <a:effectRef idx="0">
+            <a:schemeClr val="accent2"/>
+          </a:effectRef>
+          <a:fontRef idx="minor">
+            <a:schemeClr val="dk1"/>
+          </a:fontRef>
+        </p:style>
+        <p:txBody>
+          <a:bodyPr wrap="square">
+            <a:spAutoFit/>
+          </a:bodyPr>
+          <a:lstStyle/>
+          <a:p>
+            <a:r>
+              <a:rPr lang="en-IN" b="1" dirty="0"/>
+              <a:t>depth(root)</a:t>
+            </a:r>
+          </a:p>
+          <a:p>
+            <a:r>
+              <a:rPr lang="en-IN" b="1" dirty="0"/>
+              <a:t>= 1 + max(depth(left), depth(right))</a:t>
+            </a:r>
+          </a:p>
+        </p:txBody>
+      </p:sp>
+      <p:pic>
+        <p:nvPicPr>
+          <p:cNvPr id="8" name="Picture 7">
+            <a:extLst>
+              <a:ext uri="{FF2B5EF4-FFF2-40B4-BE49-F238E27FC236}">
+                <a16:creationId xmlns:a16="http://schemas.microsoft.com/office/drawing/2014/main" id="{159B824D-096D-5F52-794A-730E3EE6483E}"/>
+              </a:ext>
+            </a:extLst>
+          </p:cNvPr>
+          <p:cNvPicPr>
+            <a:picLocks noChangeAspect="1"/>
+          </p:cNvPicPr>
+          <p:nvPr/>
+        </p:nvPicPr>
+        <p:blipFill>
+          <a:blip r:embed="rId3"/>
+          <a:stretch>
+            <a:fillRect/>
+          </a:stretch>
+        </p:blipFill>
+        <p:spPr>
+          <a:xfrm>
+            <a:off x="3048000" y="3129711"/>
+            <a:ext cx="4420217" cy="2486372"/>
+          </a:xfrm>
+          <a:prstGeom prst="rect">
+            <a:avLst/>
+          </a:prstGeom>
+        </p:spPr>
+      </p:pic>
+      <p:pic>
+        <p:nvPicPr>
+          <p:cNvPr id="10" name="Graphic 9" descr="Badge 3 with solid fill">
+            <a:extLst>
+              <a:ext uri="{FF2B5EF4-FFF2-40B4-BE49-F238E27FC236}">
+                <a16:creationId xmlns:a16="http://schemas.microsoft.com/office/drawing/2014/main" id="{BE45A6F9-53E4-91B8-55E9-A2724C275D6B}"/>
+              </a:ext>
+            </a:extLst>
+          </p:cNvPr>
+          <p:cNvPicPr>
+            <a:picLocks noChangeAspect="1"/>
+          </p:cNvPicPr>
+          <p:nvPr/>
+        </p:nvPicPr>
+        <p:blipFill>
+          <a:blip>
+            <a:extLst>
+              <a:ext uri="{96DAC541-7B7A-43D3-8B79-37D633B846F1}">
+                <asvg:svgBlip xmlns:asvg="http://schemas.microsoft.com/office/drawing/2016/SVG/main" r:embed="rId4"/>
+              </a:ext>
+            </a:extLst>
+          </a:blip>
+          <a:stretch>
+            <a:fillRect/>
+          </a:stretch>
+        </p:blipFill>
+        <p:spPr>
+          <a:xfrm>
+            <a:off x="8422193" y="4701683"/>
+            <a:ext cx="914400" cy="914400"/>
+          </a:xfrm>
+          <a:prstGeom prst="rect">
+            <a:avLst/>
+          </a:prstGeom>
+        </p:spPr>
+      </p:pic>
+      <p:sp>
+        <p:nvSpPr>
+          <p:cNvPr id="11" name="TextBox 10">
+            <a:extLst>
+              <a:ext uri="{FF2B5EF4-FFF2-40B4-BE49-F238E27FC236}">
+                <a16:creationId xmlns:a16="http://schemas.microsoft.com/office/drawing/2014/main" id="{AF9442C3-329C-E555-6FF9-297EB028EFB9}"/>
+              </a:ext>
+            </a:extLst>
+          </p:cNvPr>
+          <p:cNvSpPr txBox="1"/>
+          <p:nvPr/>
+        </p:nvSpPr>
+        <p:spPr>
+          <a:xfrm>
+            <a:off x="9336593" y="4974217"/>
+            <a:ext cx="1255472" cy="369332"/>
+          </a:xfrm>
+          <a:prstGeom prst="rect">
+            <a:avLst/>
+          </a:prstGeom>
+        </p:spPr>
+        <p:style>
+          <a:lnRef idx="2">
+            <a:schemeClr val="accent2">
+              <a:shade val="15000"/>
+            </a:schemeClr>
+          </a:lnRef>
+          <a:fillRef idx="1">
+            <a:schemeClr val="accent2"/>
+          </a:fillRef>
+          <a:effectRef idx="0">
+            <a:schemeClr val="accent2"/>
+          </a:effectRef>
+          <a:fontRef idx="minor">
+            <a:schemeClr val="lt1"/>
+          </a:fontRef>
+        </p:style>
+        <p:txBody>
+          <a:bodyPr wrap="none" rtlCol="0">
+            <a:spAutoFit/>
+          </a:bodyPr>
+          <a:lstStyle/>
+          <a:p>
+            <a:r>
+              <a:rPr lang="en-US" b="1" dirty="0" err="1"/>
+              <a:t>MaxDepth</a:t>
+            </a:r>
+            <a:endParaRPr lang="en-IN" b="1" dirty="0"/>
+          </a:p>
+        </p:txBody>
+      </p:sp>
+    </p:spTree>
+    <p:extLst>
+      <p:ext uri="{BB962C8B-B14F-4D97-AF65-F5344CB8AC3E}">
+        <p14:creationId xmlns:p14="http://schemas.microsoft.com/office/powerpoint/2010/main" val="3113820538"/>
+      </p:ext>
+    </p:extLst>
+  </p:cSld>
+  <p:clrMapOvr>
+    <a:masterClrMapping/>
+  </p:clrMapOvr>
+  <p:timing>
+    <p:tnLst>
+      <p:par>
+        <p:cTn id="1" dur="indefinite" restart="never" nodeType="tmRoot">
+          <p:childTnLst>
+            <p:seq concurrent="1" nextAc="seek">
+              <p:cTn id="2" dur="indefinite" nodeType="mainSeq">
+                <p:childTnLst>
+                  <p:par>
+                    <p:cTn id="3" fill="hold">
+                      <p:stCondLst>
+                        <p:cond delay="indefinite"/>
+                      </p:stCondLst>
+                      <p:childTnLst>
+                        <p:par>
+                          <p:cTn id="4" fill="hold">
+                            <p:stCondLst>
+                              <p:cond delay="0"/>
+                            </p:stCondLst>
+                            <p:childTnLst>
+                              <p:par>
+                                <p:cTn id="5" presetID="1" presetClass="entr" presetSubtype="0" fill="hold" nodeType="clickEffect">
+                                  <p:stCondLst>
+                                    <p:cond delay="0"/>
+                                  </p:stCondLst>
+                                  <p:childTnLst>
+                                    <p:set>
+                                      <p:cBhvr>
+                                        <p:cTn id="6" dur="1" fill="hold">
+                                          <p:stCondLst>
+                                            <p:cond delay="0"/>
+                                          </p:stCondLst>
+                                        </p:cTn>
+                                        <p:tgtEl>
+                                          <p:spTgt spid="10"/>
+                                        </p:tgtEl>
+                                        <p:attrNameLst>
+                                          <p:attrName>style.visibility</p:attrName>
+                                        </p:attrNameLst>
+                                      </p:cBhvr>
+                                      <p:to>
+                                        <p:strVal val="visible"/>
+                                      </p:to>
+                                    </p:set>
+                                  </p:childTnLst>
+                                </p:cTn>
+                              </p:par>
+                            </p:childTnLst>
+                          </p:cTn>
+                        </p:par>
+                      </p:childTnLst>
+                    </p:cTn>
+                  </p:par>
+                  <p:par>
+                    <p:cTn id="7" fill="hold">
+                      <p:stCondLst>
+                        <p:cond delay="indefinite"/>
+                      </p:stCondLst>
+                      <p:childTnLst>
+                        <p:par>
+                          <p:cTn id="8" fill="hold">
+                            <p:stCondLst>
+                              <p:cond delay="0"/>
+                            </p:stCondLst>
+                            <p:childTnLst>
+                              <p:par>
+                                <p:cTn id="9" presetID="1" presetClass="entr" presetSubtype="0" fill="hold" grpId="0" nodeType="clickEffect">
+                                  <p:stCondLst>
+                                    <p:cond delay="0"/>
+                                  </p:stCondLst>
+                                  <p:childTnLst>
+                                    <p:set>
+                                      <p:cBhvr>
+                                        <p:cTn id="10" dur="1" fill="hold">
+                                          <p:stCondLst>
+                                            <p:cond delay="0"/>
+                                          </p:stCondLst>
+                                        </p:cTn>
+                                        <p:tgtEl>
+                                          <p:spTgt spid="11">
+                                            <p:bg/>
+                                          </p:spTgt>
+                                        </p:tgtEl>
+                                        <p:attrNameLst>
+                                          <p:attrName>style.visibility</p:attrName>
+                                        </p:attrNameLst>
+                                      </p:cBhvr>
+                                      <p:to>
+                                        <p:strVal val="visible"/>
+                                      </p:to>
+                                    </p:set>
+                                  </p:childTnLst>
+                                </p:cTn>
+                              </p:par>
+                              <p:par>
+                                <p:cTn id="11" presetID="1" presetClass="entr" presetSubtype="0" fill="hold" grpId="0" nodeType="withEffect">
+                                  <p:stCondLst>
+                                    <p:cond delay="0"/>
+                                  </p:stCondLst>
+                                  <p:childTnLst>
+                                    <p:set>
+                                      <p:cBhvr>
+                                        <p:cTn id="12" dur="1" fill="hold">
+                                          <p:stCondLst>
+                                            <p:cond delay="0"/>
+                                          </p:stCondLst>
+                                        </p:cTn>
+                                        <p:tgtEl>
+                                          <p:spTgt spid="11">
+                                            <p:txEl>
+                                              <p:pRg st="0" end="0"/>
+                                            </p:txEl>
+                                          </p:spTgt>
+                                        </p:tgtEl>
+                                        <p:attrNameLst>
+                                          <p:attrName>style.visibility</p:attrName>
+                                        </p:attrNameLst>
+                                      </p:cBhvr>
+                                      <p:to>
+                                        <p:strVal val="visible"/>
+                                      </p:to>
+                                    </p:set>
+                                  </p:childTnLst>
+                                </p:cTn>
+                              </p:par>
+                            </p:childTnLst>
+                          </p:cTn>
+                        </p:par>
+                      </p:childTnLst>
+                    </p:cTn>
+                  </p:par>
+                </p:childTnLst>
+              </p:cTn>
+              <p:prevCondLst>
+                <p:cond evt="onPrev" delay="0">
+                  <p:tgtEl>
+                    <p:sldTgt/>
+                  </p:tgtEl>
+                </p:cond>
+              </p:prevCondLst>
+              <p:nextCondLst>
+                <p:cond evt="onNext" delay="0">
+                  <p:tgtEl>
+                    <p:sldTgt/>
+                  </p:tgtEl>
+                </p:cond>
+              </p:nextCondLst>
+            </p:seq>
+          </p:childTnLst>
+        </p:cTn>
+      </p:par>
+    </p:tnLst>
+    <p:bldLst>
+      <p:bldP spid="11" grpId="0" build="allAtOnce" animBg="1"/>
+    </p:bldLst>
+  </p:timing>
+</p:sld>
+</file>
+
 <file path=ppt/slides/slide3.xml><?xml version="1.0" encoding="utf-8"?>
 <p:sld xmlns:a="http://schemas.openxmlformats.org/drawingml/2006/main" xmlns:r="http://schemas.openxmlformats.org/officeDocument/2006/relationships" xmlns:p="http://schemas.openxmlformats.org/presentationml/2006/main">
   <p:cSld>
@@ -6688,11 +11057,11 @@
   <p:clrMapOvr>
     <a:masterClrMapping/>
   </p:clrMapOvr>
-  <mc:AlternateContent xmlns:mc="http://schemas.openxmlformats.org/markup-compatibility/2006">
-    <mc:Choice xmlns:p14="http://schemas.microsoft.com/office/powerpoint/2010/main" Requires="p14">
+  <mc:AlternateContent xmlns:mc="http://schemas.openxmlformats.org/markup-compatibility/2006" xmlns:p14="http://schemas.microsoft.com/office/powerpoint/2010/main">
+    <mc:Choice Requires="p14">
       <p:transition spd="slow" p14:dur="2000" advTm="13550"/>
     </mc:Choice>
-    <mc:Fallback>
+    <mc:Fallback xmlns="">
       <p:transition spd="slow" advTm="13550"/>
     </mc:Fallback>
   </mc:AlternateContent>
@@ -8278,7 +12647,7 @@
     <p:bldLst>
       <p:bldP spid="5" grpId="0"/>
       <p:bldP spid="11" grpId="0"/>
-      <p:bldP spid="13" grpId="0"/>
+      <p:bldP spid="13" grpId="0" animBg="1"/>
       <p:bldP spid="4" grpId="0"/>
     </p:bldLst>
   </p:timing>
@@ -8302,10 +12671,687 @@
           <a:chExt cx="0" cy="0"/>
         </a:xfrm>
       </p:grpSpPr>
+      <p:sp>
+        <p:nvSpPr>
+          <p:cNvPr id="2" name="Rectangle 1">
+            <a:extLst>
+              <a:ext uri="{FF2B5EF4-FFF2-40B4-BE49-F238E27FC236}">
+                <a16:creationId xmlns:a16="http://schemas.microsoft.com/office/drawing/2014/main" id="{F1902F5C-89C2-A424-A848-2B9F09B4ADC0}"/>
+              </a:ext>
+            </a:extLst>
+          </p:cNvPr>
+          <p:cNvSpPr/>
+          <p:nvPr/>
+        </p:nvSpPr>
+        <p:spPr>
+          <a:xfrm>
+            <a:off x="757711" y="1040213"/>
+            <a:ext cx="10676577" cy="1200329"/>
+          </a:xfrm>
+          <a:prstGeom prst="rect">
+            <a:avLst/>
+          </a:prstGeom>
+          <a:noFill/>
+        </p:spPr>
+        <p:txBody>
+          <a:bodyPr wrap="none" lIns="91440" tIns="45720" rIns="91440" bIns="45720">
+            <a:spAutoFit/>
+            <a:scene3d>
+              <a:camera prst="orthographicFront"/>
+              <a:lightRig rig="harsh" dir="t"/>
+            </a:scene3d>
+            <a:sp3d extrusionH="57150" prstMaterial="matte">
+              <a:bevelT w="63500" h="12700" prst="angle"/>
+              <a:contourClr>
+                <a:schemeClr val="bg1">
+                  <a:lumMod val="65000"/>
+                </a:schemeClr>
+              </a:contourClr>
+            </a:sp3d>
+          </a:bodyPr>
+          <a:lstStyle/>
+          <a:p>
+            <a:pPr algn="ctr"/>
+            <a:r>
+              <a:rPr lang="en-IN" sz="7200" dirty="0">
+                <a:ln w="0"/>
+                <a:solidFill>
+                  <a:schemeClr val="accent1"/>
+                </a:solidFill>
+                <a:effectLst>
+                  <a:outerShdw blurRad="38100" dist="25400" dir="5400000" algn="ctr" rotWithShape="0">
+                    <a:srgbClr val="6E747A">
+                      <a:alpha val="43000"/>
+                    </a:srgbClr>
+                  </a:outerShdw>
+                </a:effectLst>
+              </a:rPr>
+              <a:t>Trees &amp; Recursion Mastery</a:t>
+            </a:r>
+            <a:endParaRPr lang="en-US" sz="28700" dirty="0">
+              <a:ln w="0"/>
+              <a:solidFill>
+                <a:schemeClr val="accent1"/>
+              </a:solidFill>
+              <a:effectLst>
+                <a:outerShdw blurRad="38100" dist="25400" dir="5400000" algn="ctr" rotWithShape="0">
+                  <a:srgbClr val="6E747A">
+                    <a:alpha val="43000"/>
+                  </a:srgbClr>
+                </a:outerShdw>
+              </a:effectLst>
+            </a:endParaRPr>
+          </a:p>
+        </p:txBody>
+      </p:sp>
+      <p:sp>
+        <p:nvSpPr>
+          <p:cNvPr id="3" name="TextBox 2">
+            <a:extLst>
+              <a:ext uri="{FF2B5EF4-FFF2-40B4-BE49-F238E27FC236}">
+                <a16:creationId xmlns:a16="http://schemas.microsoft.com/office/drawing/2014/main" id="{32312B6A-AC3B-036E-C80F-6C57259AEF4B}"/>
+              </a:ext>
+            </a:extLst>
+          </p:cNvPr>
+          <p:cNvSpPr txBox="1"/>
+          <p:nvPr/>
+        </p:nvSpPr>
+        <p:spPr>
+          <a:xfrm>
+            <a:off x="2487561" y="3047799"/>
+            <a:ext cx="6762492" cy="1569660"/>
+          </a:xfrm>
+          <a:prstGeom prst="rect">
+            <a:avLst/>
+          </a:prstGeom>
+        </p:spPr>
+        <p:style>
+          <a:lnRef idx="3">
+            <a:schemeClr val="lt1"/>
+          </a:lnRef>
+          <a:fillRef idx="1">
+            <a:schemeClr val="accent4"/>
+          </a:fillRef>
+          <a:effectRef idx="1">
+            <a:schemeClr val="accent4"/>
+          </a:effectRef>
+          <a:fontRef idx="minor">
+            <a:schemeClr val="lt1"/>
+          </a:fontRef>
+        </p:style>
+        <p:txBody>
+          <a:bodyPr wrap="none" rtlCol="0">
+            <a:spAutoFit/>
+          </a:bodyPr>
+          <a:lstStyle/>
+          <a:p>
+            <a:pPr marL="285750" indent="-285750">
+              <a:buFont typeface="Arial" panose="020B0604020202020204" pitchFamily="34" charset="0"/>
+              <a:buChar char="•"/>
+            </a:pPr>
+            <a:r>
+              <a:rPr lang="en-US" sz="3200" dirty="0"/>
+              <a:t>Keep your notebooks and pen ready</a:t>
+            </a:r>
+          </a:p>
+          <a:p>
+            <a:pPr marL="285750" indent="-285750">
+              <a:buFont typeface="Arial" panose="020B0604020202020204" pitchFamily="34" charset="0"/>
+              <a:buChar char="•"/>
+            </a:pPr>
+            <a:r>
+              <a:rPr lang="en-US" sz="3200" dirty="0"/>
+              <a:t>Take notes as we progress</a:t>
+            </a:r>
+          </a:p>
+          <a:p>
+            <a:pPr marL="285750" indent="-285750">
+              <a:buFont typeface="Arial" panose="020B0604020202020204" pitchFamily="34" charset="0"/>
+              <a:buChar char="•"/>
+            </a:pPr>
+            <a:r>
+              <a:rPr lang="en-US" sz="3200" dirty="0"/>
+              <a:t>Solve Assignments</a:t>
+            </a:r>
+            <a:endParaRPr lang="en-IN" sz="3200" dirty="0"/>
+          </a:p>
+        </p:txBody>
+      </p:sp>
+      <p:pic>
+        <p:nvPicPr>
+          <p:cNvPr id="4" name="Graphic 3" descr="Right pointing backhand index outline">
+            <a:extLst>
+              <a:ext uri="{FF2B5EF4-FFF2-40B4-BE49-F238E27FC236}">
+                <a16:creationId xmlns:a16="http://schemas.microsoft.com/office/drawing/2014/main" id="{6AEFF592-7272-C635-430F-D716B298BDB2}"/>
+              </a:ext>
+            </a:extLst>
+          </p:cNvPr>
+          <p:cNvPicPr>
+            <a:picLocks noChangeAspect="1"/>
+          </p:cNvPicPr>
+          <p:nvPr/>
+        </p:nvPicPr>
+        <p:blipFill>
+          <a:blip>
+            <a:extLst>
+              <a:ext uri="{96DAC541-7B7A-43D3-8B79-37D633B846F1}">
+                <asvg:svgBlip xmlns:asvg="http://schemas.microsoft.com/office/drawing/2016/SVG/main" r:embed="rId2"/>
+              </a:ext>
+            </a:extLst>
+          </a:blip>
+          <a:stretch>
+            <a:fillRect/>
+          </a:stretch>
+        </p:blipFill>
+        <p:spPr>
+          <a:xfrm>
+            <a:off x="639724" y="3131130"/>
+            <a:ext cx="1761633" cy="1761633"/>
+          </a:xfrm>
+          <a:prstGeom prst="rect">
+            <a:avLst/>
+          </a:prstGeom>
+        </p:spPr>
+      </p:pic>
     </p:spTree>
     <p:extLst>
       <p:ext uri="{BB962C8B-B14F-4D97-AF65-F5344CB8AC3E}">
         <p14:creationId xmlns:p14="http://schemas.microsoft.com/office/powerpoint/2010/main" val="883584769"/>
+      </p:ext>
+    </p:extLst>
+  </p:cSld>
+  <p:clrMapOvr>
+    <a:masterClrMapping/>
+  </p:clrMapOvr>
+</p:sld>
+</file>
+
+<file path=ppt/slides/slide8.xml><?xml version="1.0" encoding="utf-8"?>
+<p:sld xmlns:a="http://schemas.openxmlformats.org/drawingml/2006/main" xmlns:r="http://schemas.openxmlformats.org/officeDocument/2006/relationships" xmlns:p="http://schemas.openxmlformats.org/presentationml/2006/main">
+  <p:cSld>
+    <p:bg>
+      <p:bgPr>
+        <a:solidFill>
+          <a:schemeClr val="bg1"/>
+        </a:solidFill>
+        <a:effectLst/>
+      </p:bgPr>
+    </p:bg>
+    <p:spTree>
+      <p:nvGrpSpPr>
+        <p:cNvPr id="1" name=""/>
+        <p:cNvGrpSpPr/>
+        <p:nvPr/>
+      </p:nvGrpSpPr>
+      <p:grpSpPr>
+        <a:xfrm>
+          <a:off x="0" y="0"/>
+          <a:ext cx="0" cy="0"/>
+          <a:chOff x="0" y="0"/>
+          <a:chExt cx="0" cy="0"/>
+        </a:xfrm>
+      </p:grpSpPr>
+      <p:pic>
+        <p:nvPicPr>
+          <p:cNvPr id="9" name="Graphic 8" descr="Right pointing backhand index outline">
+            <a:extLst>
+              <a:ext uri="{FF2B5EF4-FFF2-40B4-BE49-F238E27FC236}">
+                <a16:creationId xmlns:a16="http://schemas.microsoft.com/office/drawing/2014/main" id="{A9FAB638-CED6-A54F-F74E-1B01BD633511}"/>
+              </a:ext>
+            </a:extLst>
+          </p:cNvPr>
+          <p:cNvPicPr>
+            <a:picLocks noChangeAspect="1"/>
+          </p:cNvPicPr>
+          <p:nvPr/>
+        </p:nvPicPr>
+        <p:blipFill>
+          <a:blip>
+            <a:extLst>
+              <a:ext uri="{96DAC541-7B7A-43D3-8B79-37D633B846F1}">
+                <asvg:svgBlip xmlns:asvg="http://schemas.microsoft.com/office/drawing/2016/SVG/main" r:embed="rId2"/>
+              </a:ext>
+            </a:extLst>
+          </a:blip>
+          <a:stretch>
+            <a:fillRect/>
+          </a:stretch>
+        </p:blipFill>
+        <p:spPr>
+          <a:xfrm>
+            <a:off x="484632" y="1667367"/>
+            <a:ext cx="3517119" cy="3517119"/>
+          </a:xfrm>
+          <a:prstGeom prst="rect">
+            <a:avLst/>
+          </a:prstGeom>
+        </p:spPr>
+      </p:pic>
+      <p:cxnSp>
+        <p:nvCxnSpPr>
+          <p:cNvPr id="17" name="Straight Connector 16">
+            <a:extLst>
+              <a:ext uri="{FF2B5EF4-FFF2-40B4-BE49-F238E27FC236}">
+                <a16:creationId xmlns:a16="http://schemas.microsoft.com/office/drawing/2014/main" id="{DCD67800-37AC-4E14-89B0-F79DCB3FB86D}"/>
+              </a:ext>
+              <a:ext uri="{C183D7F6-B498-43B3-948B-1728B52AA6E4}">
+                <adec:decorative xmlns:adec="http://schemas.microsoft.com/office/drawing/2017/decorative" val="1"/>
+              </a:ext>
+            </a:extLst>
+          </p:cNvPr>
+          <p:cNvCxnSpPr>
+            <a:cxnSpLocks noGrp="1" noRot="1" noChangeAspect="1" noMove="1" noResize="1" noEditPoints="1" noAdjustHandles="1" noChangeArrowheads="1" noChangeShapeType="1"/>
+          </p:cNvCxnSpPr>
+          <p:nvPr>
+            <p:extLst>
+              <p:ext uri="{386F3935-93C4-4BCD-93E2-E3B085C9AB24}">
+                <p16:designElem xmlns:p16="http://schemas.microsoft.com/office/powerpoint/2015/main" val="1"/>
+              </p:ext>
+            </p:extLst>
+          </p:nvPr>
+        </p:nvCxnSpPr>
+        <p:spPr>
+          <a:xfrm>
+            <a:off x="4165600" y="1573887"/>
+            <a:ext cx="0" cy="3710227"/>
+          </a:xfrm>
+          <a:prstGeom prst="line">
+            <a:avLst/>
+          </a:prstGeom>
+          <a:ln w="19050">
+            <a:solidFill>
+              <a:srgbClr val="7F7F7F"/>
+            </a:solidFill>
+          </a:ln>
+        </p:spPr>
+        <p:style>
+          <a:lnRef idx="1">
+            <a:schemeClr val="accent1"/>
+          </a:lnRef>
+          <a:fillRef idx="0">
+            <a:schemeClr val="accent1"/>
+          </a:fillRef>
+          <a:effectRef idx="0">
+            <a:schemeClr val="accent1"/>
+          </a:effectRef>
+          <a:fontRef idx="minor">
+            <a:schemeClr val="tx1"/>
+          </a:fontRef>
+        </p:style>
+      </p:cxnSp>
+      <p:pic>
+        <p:nvPicPr>
+          <p:cNvPr id="12" name="Picture 11">
+            <a:extLst>
+              <a:ext uri="{FF2B5EF4-FFF2-40B4-BE49-F238E27FC236}">
+                <a16:creationId xmlns:a16="http://schemas.microsoft.com/office/drawing/2014/main" id="{2B413928-E423-C5BC-066D-418FC18030AB}"/>
+              </a:ext>
+            </a:extLst>
+          </p:cNvPr>
+          <p:cNvPicPr>
+            <a:picLocks noChangeAspect="1"/>
+          </p:cNvPicPr>
+          <p:nvPr/>
+        </p:nvPicPr>
+        <p:blipFill>
+          <a:blip r:embed="rId3"/>
+          <a:stretch>
+            <a:fillRect/>
+          </a:stretch>
+        </p:blipFill>
+        <p:spPr>
+          <a:xfrm>
+            <a:off x="4310676" y="2551019"/>
+            <a:ext cx="3537345" cy="1749816"/>
+          </a:xfrm>
+          <a:prstGeom prst="rect">
+            <a:avLst/>
+          </a:prstGeom>
+        </p:spPr>
+      </p:pic>
+      <p:cxnSp>
+        <p:nvCxnSpPr>
+          <p:cNvPr id="19" name="Straight Connector 18">
+            <a:extLst>
+              <a:ext uri="{FF2B5EF4-FFF2-40B4-BE49-F238E27FC236}">
+                <a16:creationId xmlns:a16="http://schemas.microsoft.com/office/drawing/2014/main" id="{20F1788F-A5AE-4188-8274-F7F2E3833ECD}"/>
+              </a:ext>
+              <a:ext uri="{C183D7F6-B498-43B3-948B-1728B52AA6E4}">
+                <adec:decorative xmlns:adec="http://schemas.microsoft.com/office/drawing/2017/decorative" val="1"/>
+              </a:ext>
+            </a:extLst>
+          </p:cNvPr>
+          <p:cNvCxnSpPr>
+            <a:cxnSpLocks noGrp="1" noRot="1" noChangeAspect="1" noMove="1" noResize="1" noEditPoints="1" noAdjustHandles="1" noChangeArrowheads="1" noChangeShapeType="1"/>
+          </p:cNvCxnSpPr>
+          <p:nvPr>
+            <p:extLst>
+              <p:ext uri="{386F3935-93C4-4BCD-93E2-E3B085C9AB24}">
+                <p16:designElem xmlns:p16="http://schemas.microsoft.com/office/powerpoint/2015/main" val="1"/>
+              </p:ext>
+            </p:extLst>
+          </p:nvPr>
+        </p:nvCxnSpPr>
+        <p:spPr>
+          <a:xfrm>
+            <a:off x="7995920" y="1573887"/>
+            <a:ext cx="0" cy="3710227"/>
+          </a:xfrm>
+          <a:prstGeom prst="line">
+            <a:avLst/>
+          </a:prstGeom>
+          <a:ln w="19050">
+            <a:solidFill>
+              <a:srgbClr val="7F7F7F"/>
+            </a:solidFill>
+          </a:ln>
+        </p:spPr>
+        <p:style>
+          <a:lnRef idx="1">
+            <a:schemeClr val="accent1"/>
+          </a:lnRef>
+          <a:fillRef idx="0">
+            <a:schemeClr val="accent1"/>
+          </a:fillRef>
+          <a:effectRef idx="0">
+            <a:schemeClr val="accent1"/>
+          </a:effectRef>
+          <a:fontRef idx="minor">
+            <a:schemeClr val="tx1"/>
+          </a:fontRef>
+        </p:style>
+      </p:cxnSp>
+      <p:pic>
+        <p:nvPicPr>
+          <p:cNvPr id="7" name="Picture 6">
+            <a:extLst>
+              <a:ext uri="{FF2B5EF4-FFF2-40B4-BE49-F238E27FC236}">
+                <a16:creationId xmlns:a16="http://schemas.microsoft.com/office/drawing/2014/main" id="{6B543DD6-D9F0-7A6B-2739-B2C7B99042D0}"/>
+              </a:ext>
+            </a:extLst>
+          </p:cNvPr>
+          <p:cNvPicPr>
+            <a:picLocks noChangeAspect="1"/>
+          </p:cNvPicPr>
+          <p:nvPr/>
+        </p:nvPicPr>
+        <p:blipFill>
+          <a:blip r:embed="rId4"/>
+          <a:stretch>
+            <a:fillRect/>
+          </a:stretch>
+        </p:blipFill>
+        <p:spPr>
+          <a:xfrm>
+            <a:off x="8162336" y="2233504"/>
+            <a:ext cx="3517120" cy="2384847"/>
+          </a:xfrm>
+          <a:prstGeom prst="rect">
+            <a:avLst/>
+          </a:prstGeom>
+        </p:spPr>
+      </p:pic>
+      <p:pic>
+        <p:nvPicPr>
+          <p:cNvPr id="14" name="Graphic 13" descr="Question Mark with solid fill">
+            <a:extLst>
+              <a:ext uri="{FF2B5EF4-FFF2-40B4-BE49-F238E27FC236}">
+                <a16:creationId xmlns:a16="http://schemas.microsoft.com/office/drawing/2014/main" id="{6C44FAED-60BB-F17E-BCD3-2D612DA4957B}"/>
+              </a:ext>
+            </a:extLst>
+          </p:cNvPr>
+          <p:cNvPicPr>
+            <a:picLocks noChangeAspect="1"/>
+          </p:cNvPicPr>
+          <p:nvPr/>
+        </p:nvPicPr>
+        <p:blipFill>
+          <a:blip>
+            <a:extLst>
+              <a:ext uri="{96DAC541-7B7A-43D3-8B79-37D633B846F1}">
+                <asvg:svgBlip xmlns:asvg="http://schemas.microsoft.com/office/drawing/2016/SVG/main" r:embed="rId5"/>
+              </a:ext>
+            </a:extLst>
+          </a:blip>
+          <a:stretch>
+            <a:fillRect/>
+          </a:stretch>
+        </p:blipFill>
+        <p:spPr>
+          <a:xfrm>
+            <a:off x="5622148" y="1116687"/>
+            <a:ext cx="914400" cy="914400"/>
+          </a:xfrm>
+          <a:prstGeom prst="rect">
+            <a:avLst/>
+          </a:prstGeom>
+        </p:spPr>
+      </p:pic>
+      <p:pic>
+        <p:nvPicPr>
+          <p:cNvPr id="16" name="Graphic 15" descr="Badge Tick with solid fill">
+            <a:extLst>
+              <a:ext uri="{FF2B5EF4-FFF2-40B4-BE49-F238E27FC236}">
+                <a16:creationId xmlns:a16="http://schemas.microsoft.com/office/drawing/2014/main" id="{61AFEB4D-F04B-A2BC-8EF5-82BB50C557B5}"/>
+              </a:ext>
+            </a:extLst>
+          </p:cNvPr>
+          <p:cNvPicPr>
+            <a:picLocks noChangeAspect="1"/>
+          </p:cNvPicPr>
+          <p:nvPr/>
+        </p:nvPicPr>
+        <p:blipFill>
+          <a:blip>
+            <a:extLst>
+              <a:ext uri="{96DAC541-7B7A-43D3-8B79-37D633B846F1}">
+                <asvg:svgBlip xmlns:asvg="http://schemas.microsoft.com/office/drawing/2016/SVG/main" r:embed="rId6"/>
+              </a:ext>
+            </a:extLst>
+          </a:blip>
+          <a:stretch>
+            <a:fillRect/>
+          </a:stretch>
+        </p:blipFill>
+        <p:spPr>
+          <a:xfrm>
+            <a:off x="9296400" y="960621"/>
+            <a:ext cx="1070466" cy="1070466"/>
+          </a:xfrm>
+          <a:prstGeom prst="rect">
+            <a:avLst/>
+          </a:prstGeom>
+        </p:spPr>
+      </p:pic>
+      <p:sp>
+        <p:nvSpPr>
+          <p:cNvPr id="20" name="TextBox 19">
+            <a:extLst>
+              <a:ext uri="{FF2B5EF4-FFF2-40B4-BE49-F238E27FC236}">
+                <a16:creationId xmlns:a16="http://schemas.microsoft.com/office/drawing/2014/main" id="{3AFD669F-9FEA-4A80-CCD7-094BB68527A9}"/>
+              </a:ext>
+            </a:extLst>
+          </p:cNvPr>
+          <p:cNvSpPr txBox="1"/>
+          <p:nvPr/>
+        </p:nvSpPr>
+        <p:spPr>
+          <a:xfrm>
+            <a:off x="4670322" y="5528047"/>
+            <a:ext cx="6096000" cy="461665"/>
+          </a:xfrm>
+          <a:prstGeom prst="rect">
+            <a:avLst/>
+          </a:prstGeom>
+        </p:spPr>
+        <p:style>
+          <a:lnRef idx="3">
+            <a:schemeClr val="lt1"/>
+          </a:lnRef>
+          <a:fillRef idx="1">
+            <a:schemeClr val="accent3"/>
+          </a:fillRef>
+          <a:effectRef idx="1">
+            <a:schemeClr val="accent3"/>
+          </a:effectRef>
+          <a:fontRef idx="minor">
+            <a:schemeClr val="lt1"/>
+          </a:fontRef>
+        </p:style>
+        <p:txBody>
+          <a:bodyPr wrap="square">
+            <a:spAutoFit/>
+          </a:bodyPr>
+          <a:lstStyle/>
+          <a:p>
+            <a:pPr algn="ctr"/>
+            <a:r>
+              <a:rPr lang="en-IN" sz="2400" dirty="0"/>
+              <a:t>A </a:t>
+            </a:r>
+            <a:r>
+              <a:rPr lang="en-IN" sz="2400" b="1" dirty="0"/>
+              <a:t>tree</a:t>
+            </a:r>
+            <a:r>
+              <a:rPr lang="en-IN" sz="2400" dirty="0"/>
+              <a:t> is simply a branching data path.</a:t>
+            </a:r>
+          </a:p>
+        </p:txBody>
+      </p:sp>
+    </p:spTree>
+    <p:extLst>
+      <p:ext uri="{BB962C8B-B14F-4D97-AF65-F5344CB8AC3E}">
+        <p14:creationId xmlns:p14="http://schemas.microsoft.com/office/powerpoint/2010/main" val="3485088703"/>
+      </p:ext>
+    </p:extLst>
+  </p:cSld>
+  <p:clrMapOvr>
+    <a:masterClrMapping/>
+  </p:clrMapOvr>
+</p:sld>
+</file>
+
+<file path=ppt/slides/slide9.xml><?xml version="1.0" encoding="utf-8"?>
+<p:sld xmlns:a="http://schemas.openxmlformats.org/drawingml/2006/main" xmlns:r="http://schemas.openxmlformats.org/officeDocument/2006/relationships" xmlns:p="http://schemas.openxmlformats.org/presentationml/2006/main">
+  <p:cSld>
+    <p:spTree>
+      <p:nvGrpSpPr>
+        <p:cNvPr id="1" name=""/>
+        <p:cNvGrpSpPr/>
+        <p:nvPr/>
+      </p:nvGrpSpPr>
+      <p:grpSpPr>
+        <a:xfrm>
+          <a:off x="0" y="0"/>
+          <a:ext cx="0" cy="0"/>
+          <a:chOff x="0" y="0"/>
+          <a:chExt cx="0" cy="0"/>
+        </a:xfrm>
+      </p:grpSpPr>
+      <p:sp>
+        <p:nvSpPr>
+          <p:cNvPr id="2" name="Title 1">
+            <a:extLst>
+              <a:ext uri="{FF2B5EF4-FFF2-40B4-BE49-F238E27FC236}">
+                <a16:creationId xmlns:a16="http://schemas.microsoft.com/office/drawing/2014/main" id="{5F392D47-9C5E-973D-59C3-3F156C169A41}"/>
+              </a:ext>
+            </a:extLst>
+          </p:cNvPr>
+          <p:cNvSpPr>
+            <a:spLocks noGrp="1"/>
+          </p:cNvSpPr>
+          <p:nvPr>
+            <p:ph type="title"/>
+          </p:nvPr>
+        </p:nvSpPr>
+        <p:spPr/>
+        <p:txBody>
+          <a:bodyPr/>
+          <a:lstStyle/>
+          <a:p>
+            <a:r>
+              <a:rPr lang="en-IN" dirty="0"/>
+              <a:t>DFS (Depth First Search)</a:t>
+            </a:r>
+          </a:p>
+        </p:txBody>
+      </p:sp>
+      <p:pic>
+        <p:nvPicPr>
+          <p:cNvPr id="4" name="Picture 3">
+            <a:extLst>
+              <a:ext uri="{FF2B5EF4-FFF2-40B4-BE49-F238E27FC236}">
+                <a16:creationId xmlns:a16="http://schemas.microsoft.com/office/drawing/2014/main" id="{2E3499AA-7A2D-EADE-908D-AFF0FA1A9127}"/>
+              </a:ext>
+            </a:extLst>
+          </p:cNvPr>
+          <p:cNvPicPr>
+            <a:picLocks noChangeAspect="1"/>
+          </p:cNvPicPr>
+          <p:nvPr/>
+        </p:nvPicPr>
+        <p:blipFill>
+          <a:blip r:embed="rId2"/>
+          <a:stretch>
+            <a:fillRect/>
+          </a:stretch>
+        </p:blipFill>
+        <p:spPr>
+          <a:xfrm>
+            <a:off x="926470" y="1690688"/>
+            <a:ext cx="5344271" cy="4182059"/>
+          </a:xfrm>
+          <a:prstGeom prst="rect">
+            <a:avLst/>
+          </a:prstGeom>
+        </p:spPr>
+      </p:pic>
+      <p:pic>
+        <p:nvPicPr>
+          <p:cNvPr id="6" name="Picture 5">
+            <a:extLst>
+              <a:ext uri="{FF2B5EF4-FFF2-40B4-BE49-F238E27FC236}">
+                <a16:creationId xmlns:a16="http://schemas.microsoft.com/office/drawing/2014/main" id="{C43476F7-8402-30AA-0637-633B85935376}"/>
+              </a:ext>
+            </a:extLst>
+          </p:cNvPr>
+          <p:cNvPicPr>
+            <a:picLocks noChangeAspect="1"/>
+          </p:cNvPicPr>
+          <p:nvPr/>
+        </p:nvPicPr>
+        <p:blipFill>
+          <a:blip r:embed="rId3"/>
+          <a:stretch>
+            <a:fillRect/>
+          </a:stretch>
+        </p:blipFill>
+        <p:spPr>
+          <a:xfrm>
+            <a:off x="7571847" y="1690688"/>
+            <a:ext cx="3781953" cy="3343742"/>
+          </a:xfrm>
+          <a:prstGeom prst="rect">
+            <a:avLst/>
+          </a:prstGeom>
+          <a:ln>
+            <a:noFill/>
+          </a:ln>
+          <a:effectLst>
+            <a:outerShdw blurRad="292100" dist="139700" dir="2700000" algn="tl" rotWithShape="0">
+              <a:srgbClr val="333333">
+                <a:alpha val="65000"/>
+              </a:srgbClr>
+            </a:outerShdw>
+          </a:effectLst>
+        </p:spPr>
+      </p:pic>
+    </p:spTree>
+    <p:extLst>
+      <p:ext uri="{BB962C8B-B14F-4D97-AF65-F5344CB8AC3E}">
+        <p14:creationId xmlns:p14="http://schemas.microsoft.com/office/powerpoint/2010/main" val="551949496"/>
       </p:ext>
     </p:extLst>
   </p:cSld>
